--- a/output_pptx/Our_God_Is_Love.pptx
+++ b/output_pptx/Our_God_Is_Love.pptx
@@ -3121,8 +3121,8 @@
         </p:nvSpPr>
         <p:spPr>
           <a:xfrm>
-            <a:off x="594360" y="1837944"/>
-            <a:ext cx="11002975" cy="685800"/>
+            <a:off x="640080" y="1650492"/>
+            <a:ext cx="10911535" cy="731520"/>
           </a:xfrm>
           <a:prstGeom prst="rect">
             <a:avLst/>
@@ -3137,7 +3137,7 @@
           <a:p>
             <a:pPr algn="ctr"/>
             <a:r>
-              <a:rPr sz="4400" b="1" i="0">
+              <a:rPr sz="4800" b="1" i="0">
                 <a:solidFill>
                   <a:srgbClr val="FFFFFF"/>
                 </a:solidFill>
@@ -3156,8 +3156,8 @@
         </p:nvSpPr>
         <p:spPr>
           <a:xfrm>
-            <a:off x="594360" y="2560320"/>
-            <a:ext cx="11002975" cy="384048"/>
+            <a:off x="640080" y="2418588"/>
+            <a:ext cx="10911535" cy="365760"/>
           </a:xfrm>
           <a:prstGeom prst="rect">
             <a:avLst/>
@@ -3174,7 +3174,7 @@
             <a:r>
               <a:rPr sz="2400" b="0" i="1">
                 <a:solidFill>
-                  <a:srgbClr val="B4B4B4"/>
+                  <a:srgbClr val="AAAAAA"/>
                 </a:solidFill>
                 <a:latin typeface="Arial"/>
               </a:rPr>
@@ -3191,8 +3191,8 @@
         </p:nvSpPr>
         <p:spPr>
           <a:xfrm>
-            <a:off x="594360" y="2980944"/>
-            <a:ext cx="11002975" cy="347472"/>
+            <a:off x="640080" y="2985516"/>
+            <a:ext cx="10911535" cy="731520"/>
           </a:xfrm>
           <a:prstGeom prst="rect">
             <a:avLst/>
@@ -3207,13 +3207,13 @@
           <a:p>
             <a:pPr algn="ctr"/>
             <a:r>
-              <a:rPr sz="2000" b="0" i="1">
-                <a:solidFill>
-                  <a:srgbClr val="8C8C8C"/>
+              <a:rPr sz="4800" b="1" i="0">
+                <a:solidFill>
+                  <a:srgbClr val="FFFFFF"/>
                 </a:solidFill>
                 <a:latin typeface="Arial"/>
               </a:rPr>
-              <a:t/>
+              <a:t>父の 愛に     希望をつかめ</a:t>
             </a:r>
           </a:p>
         </p:txBody>
@@ -3226,8 +3226,8 @@
         </p:nvSpPr>
         <p:spPr>
           <a:xfrm>
-            <a:off x="594360" y="3529584"/>
-            <a:ext cx="11002975" cy="685800"/>
+            <a:off x="640080" y="3753612"/>
+            <a:ext cx="10911535" cy="365760"/>
           </a:xfrm>
           <a:prstGeom prst="rect">
             <a:avLst/>
@@ -3242,13 +3242,13 @@
           <a:p>
             <a:pPr algn="ctr"/>
             <a:r>
-              <a:rPr sz="4400" b="1" i="0">
-                <a:solidFill>
-                  <a:srgbClr val="FFFFFF"/>
+              <a:rPr sz="2400" b="0" i="1">
+                <a:solidFill>
+                  <a:srgbClr val="AAAAAA"/>
                 </a:solidFill>
                 <a:latin typeface="Arial"/>
               </a:rPr>
-              <a:t>父の 愛に     希望をつかめ</a:t>
+              <a:t>chichi no ai ni kibou wo tsukame</a:t>
             </a:r>
           </a:p>
         </p:txBody>
@@ -3261,8 +3261,8 @@
         </p:nvSpPr>
         <p:spPr>
           <a:xfrm>
-            <a:off x="594360" y="4251960"/>
-            <a:ext cx="11002975" cy="384048"/>
+            <a:off x="640080" y="4530852"/>
+            <a:ext cx="10911535" cy="310896"/>
           </a:xfrm>
           <a:prstGeom prst="rect">
             <a:avLst/>
@@ -3277,13 +3277,13 @@
           <a:p>
             <a:pPr algn="ctr"/>
             <a:r>
-              <a:rPr sz="2400" b="0" i="1">
-                <a:solidFill>
-                  <a:srgbClr val="B4B4B4"/>
+              <a:rPr sz="2000" b="0" i="1">
+                <a:solidFill>
+                  <a:srgbClr val="828282"/>
                 </a:solidFill>
                 <a:latin typeface="Arial"/>
               </a:rPr>
-              <a:t>chichi no ai ni kibou wo tsukame</a:t>
+              <a:t>Nosso Deus É Amor</a:t>
             </a:r>
           </a:p>
         </p:txBody>
@@ -3296,8 +3296,8 @@
         </p:nvSpPr>
         <p:spPr>
           <a:xfrm>
-            <a:off x="594360" y="4672584"/>
-            <a:ext cx="11002975" cy="347472"/>
+            <a:off x="640080" y="4896612"/>
+            <a:ext cx="10911535" cy="310896"/>
           </a:xfrm>
           <a:prstGeom prst="rect">
             <a:avLst/>
@@ -3314,11 +3314,11 @@
             <a:r>
               <a:rPr sz="2000" b="0" i="1">
                 <a:solidFill>
-                  <a:srgbClr val="8C8C8C"/>
+                  <a:srgbClr val="828282"/>
                 </a:solidFill>
                 <a:latin typeface="Arial"/>
               </a:rPr>
-              <a:t/>
+              <a:t>Toda alma e todo coração palpitante</a:t>
             </a:r>
           </a:p>
         </p:txBody>
@@ -3357,8 +3357,8 @@
         </p:nvSpPr>
         <p:spPr>
           <a:xfrm>
-            <a:off x="594360" y="2258568"/>
-            <a:ext cx="11002975" cy="685800"/>
+            <a:off x="640080" y="2052828"/>
+            <a:ext cx="10911535" cy="731520"/>
           </a:xfrm>
           <a:prstGeom prst="rect">
             <a:avLst/>
@@ -3373,7 +3373,7 @@
           <a:p>
             <a:pPr algn="ctr"/>
             <a:r>
-              <a:rPr sz="4400" b="1" i="0">
+              <a:rPr sz="4800" b="1" i="0">
                 <a:solidFill>
                   <a:srgbClr val="FFFFFF"/>
                 </a:solidFill>
@@ -3392,8 +3392,8 @@
         </p:nvSpPr>
         <p:spPr>
           <a:xfrm>
-            <a:off x="594360" y="2980944"/>
-            <a:ext cx="11002975" cy="347472"/>
+            <a:off x="640080" y="2985516"/>
+            <a:ext cx="10911535" cy="731520"/>
           </a:xfrm>
           <a:prstGeom prst="rect">
             <a:avLst/>
@@ -3408,83 +3408,13 @@
           <a:p>
             <a:pPr algn="ctr"/>
             <a:r>
-              <a:rPr sz="2200" b="0" i="1">
-                <a:solidFill>
-                  <a:srgbClr val="8C8C8C"/>
-                </a:solidFill>
-                <a:latin typeface="Arial"/>
-              </a:rPr>
-              <a:t/>
-            </a:r>
-          </a:p>
-        </p:txBody>
-      </p:sp>
-      <p:sp>
-        <p:nvSpPr>
-          <p:cNvPr id="4" name="TextBox 3"/>
-          <p:cNvSpPr txBox="1"/>
-          <p:nvPr/>
-        </p:nvSpPr>
-        <p:spPr>
-          <a:xfrm>
-            <a:off x="594360" y="3529584"/>
-            <a:ext cx="11002975" cy="685800"/>
-          </a:xfrm>
-          <a:prstGeom prst="rect">
-            <a:avLst/>
-          </a:prstGeom>
-          <a:noFill/>
-        </p:spPr>
-        <p:txBody>
-          <a:bodyPr wrap="square">
-            <a:spAutoFit/>
-          </a:bodyPr>
-          <a:lstStyle/>
-          <a:p>
-            <a:pPr algn="ctr"/>
-            <a:r>
-              <a:rPr sz="4400" b="1" i="0">
+              <a:rPr sz="4800" b="1" i="0">
                 <a:solidFill>
                   <a:srgbClr val="FFFFFF"/>
                 </a:solidFill>
                 <a:latin typeface="Arial"/>
               </a:rPr>
               <a:t>Jesus veio e morreu</a:t>
-            </a:r>
-          </a:p>
-        </p:txBody>
-      </p:sp>
-      <p:sp>
-        <p:nvSpPr>
-          <p:cNvPr id="5" name="TextBox 4"/>
-          <p:cNvSpPr txBox="1"/>
-          <p:nvPr/>
-        </p:nvSpPr>
-        <p:spPr>
-          <a:xfrm>
-            <a:off x="594360" y="4251960"/>
-            <a:ext cx="11002975" cy="347472"/>
-          </a:xfrm>
-          <a:prstGeom prst="rect">
-            <a:avLst/>
-          </a:prstGeom>
-          <a:noFill/>
-        </p:spPr>
-        <p:txBody>
-          <a:bodyPr wrap="square">
-            <a:spAutoFit/>
-          </a:bodyPr>
-          <a:lstStyle/>
-          <a:p>
-            <a:pPr algn="ctr"/>
-            <a:r>
-              <a:rPr sz="2200" b="0" i="1">
-                <a:solidFill>
-                  <a:srgbClr val="8C8C8C"/>
-                </a:solidFill>
-                <a:latin typeface="Arial"/>
-              </a:rPr>
-              <a:t/>
             </a:r>
           </a:p>
         </p:txBody>
@@ -3523,8 +3453,8 @@
         </p:nvSpPr>
         <p:spPr>
           <a:xfrm>
-            <a:off x="594360" y="2258568"/>
-            <a:ext cx="11002975" cy="685800"/>
+            <a:off x="640080" y="2052828"/>
+            <a:ext cx="10911535" cy="731520"/>
           </a:xfrm>
           <a:prstGeom prst="rect">
             <a:avLst/>
@@ -3539,7 +3469,7 @@
           <a:p>
             <a:pPr algn="ctr"/>
             <a:r>
-              <a:rPr sz="4400" b="1" i="0">
+              <a:rPr sz="4800" b="1" i="0">
                 <a:solidFill>
                   <a:srgbClr val="FFFFFF"/>
                 </a:solidFill>
@@ -3558,8 +3488,8 @@
         </p:nvSpPr>
         <p:spPr>
           <a:xfrm>
-            <a:off x="594360" y="2980944"/>
-            <a:ext cx="11002975" cy="347472"/>
+            <a:off x="640080" y="2985516"/>
+            <a:ext cx="10911535" cy="731520"/>
           </a:xfrm>
           <a:prstGeom prst="rect">
             <a:avLst/>
@@ -3574,83 +3504,13 @@
           <a:p>
             <a:pPr algn="ctr"/>
             <a:r>
-              <a:rPr sz="2200" b="0" i="1">
-                <a:solidFill>
-                  <a:srgbClr val="8C8C8C"/>
-                </a:solidFill>
-                <a:latin typeface="Arial"/>
-              </a:rPr>
-              <a:t/>
-            </a:r>
-          </a:p>
-        </p:txBody>
-      </p:sp>
-      <p:sp>
-        <p:nvSpPr>
-          <p:cNvPr id="4" name="TextBox 3"/>
-          <p:cNvSpPr txBox="1"/>
-          <p:nvPr/>
-        </p:nvSpPr>
-        <p:spPr>
-          <a:xfrm>
-            <a:off x="594360" y="3529584"/>
-            <a:ext cx="11002975" cy="685800"/>
-          </a:xfrm>
-          <a:prstGeom prst="rect">
-            <a:avLst/>
-          </a:prstGeom>
-          <a:noFill/>
-        </p:spPr>
-        <p:txBody>
-          <a:bodyPr wrap="square">
-            <a:spAutoFit/>
-          </a:bodyPr>
-          <a:lstStyle/>
-          <a:p>
-            <a:pPr algn="ctr"/>
-            <a:r>
-              <a:rPr sz="4400" b="1" i="0">
+              <a:rPr sz="4800" b="1" i="0">
                 <a:solidFill>
                   <a:srgbClr val="FFFFFF"/>
                 </a:solidFill>
                 <a:latin typeface="Arial"/>
               </a:rPr>
               <a:t>Vamos levantar nossas vozes</a:t>
-            </a:r>
-          </a:p>
-        </p:txBody>
-      </p:sp>
-      <p:sp>
-        <p:nvSpPr>
-          <p:cNvPr id="5" name="TextBox 4"/>
-          <p:cNvSpPr txBox="1"/>
-          <p:nvPr/>
-        </p:nvSpPr>
-        <p:spPr>
-          <a:xfrm>
-            <a:off x="594360" y="4251960"/>
-            <a:ext cx="11002975" cy="347472"/>
-          </a:xfrm>
-          <a:prstGeom prst="rect">
-            <a:avLst/>
-          </a:prstGeom>
-          <a:noFill/>
-        </p:spPr>
-        <p:txBody>
-          <a:bodyPr wrap="square">
-            <a:spAutoFit/>
-          </a:bodyPr>
-          <a:lstStyle/>
-          <a:p>
-            <a:pPr algn="ctr"/>
-            <a:r>
-              <a:rPr sz="2200" b="0" i="1">
-                <a:solidFill>
-                  <a:srgbClr val="8C8C8C"/>
-                </a:solidFill>
-                <a:latin typeface="Arial"/>
-              </a:rPr>
-              <a:t/>
             </a:r>
           </a:p>
         </p:txBody>
@@ -3689,8 +3549,8 @@
         </p:nvSpPr>
         <p:spPr>
           <a:xfrm>
-            <a:off x="594360" y="2258568"/>
-            <a:ext cx="11002975" cy="685800"/>
+            <a:off x="640080" y="2052828"/>
+            <a:ext cx="10911535" cy="731520"/>
           </a:xfrm>
           <a:prstGeom prst="rect">
             <a:avLst/>
@@ -3705,7 +3565,7 @@
           <a:p>
             <a:pPr algn="ctr"/>
             <a:r>
-              <a:rPr sz="4400" b="1" i="0">
+              <a:rPr sz="4800" b="1" i="0">
                 <a:solidFill>
                   <a:srgbClr val="FFFFFF"/>
                 </a:solidFill>
@@ -3724,8 +3584,8 @@
         </p:nvSpPr>
         <p:spPr>
           <a:xfrm>
-            <a:off x="594360" y="2980944"/>
-            <a:ext cx="11002975" cy="347472"/>
+            <a:off x="640080" y="2985516"/>
+            <a:ext cx="10911535" cy="731520"/>
           </a:xfrm>
           <a:prstGeom prst="rect">
             <a:avLst/>
@@ -3740,83 +3600,13 @@
           <a:p>
             <a:pPr algn="ctr"/>
             <a:r>
-              <a:rPr sz="2200" b="0" i="1">
-                <a:solidFill>
-                  <a:srgbClr val="8C8C8C"/>
-                </a:solidFill>
-                <a:latin typeface="Arial"/>
-              </a:rPr>
-              <a:t/>
-            </a:r>
-          </a:p>
-        </p:txBody>
-      </p:sp>
-      <p:sp>
-        <p:nvSpPr>
-          <p:cNvPr id="4" name="TextBox 3"/>
-          <p:cNvSpPr txBox="1"/>
-          <p:nvPr/>
-        </p:nvSpPr>
-        <p:spPr>
-          <a:xfrm>
-            <a:off x="594360" y="3529584"/>
-            <a:ext cx="11002975" cy="685800"/>
-          </a:xfrm>
-          <a:prstGeom prst="rect">
-            <a:avLst/>
-          </a:prstGeom>
-          <a:noFill/>
-        </p:spPr>
-        <p:txBody>
-          <a:bodyPr wrap="square">
-            <a:spAutoFit/>
-          </a:bodyPr>
-          <a:lstStyle/>
-          <a:p>
-            <a:pPr algn="ctr"/>
-            <a:r>
-              <a:rPr sz="4400" b="1" i="0">
+              <a:rPr sz="4800" b="1" i="0">
                 <a:solidFill>
                   <a:srgbClr val="FFFFFF"/>
                 </a:solidFill>
                 <a:latin typeface="Arial"/>
               </a:rPr>
               <a:t>Nosso pecado é superado</a:t>
-            </a:r>
-          </a:p>
-        </p:txBody>
-      </p:sp>
-      <p:sp>
-        <p:nvSpPr>
-          <p:cNvPr id="5" name="TextBox 4"/>
-          <p:cNvSpPr txBox="1"/>
-          <p:nvPr/>
-        </p:nvSpPr>
-        <p:spPr>
-          <a:xfrm>
-            <a:off x="594360" y="4251960"/>
-            <a:ext cx="11002975" cy="347472"/>
-          </a:xfrm>
-          <a:prstGeom prst="rect">
-            <a:avLst/>
-          </a:prstGeom>
-          <a:noFill/>
-        </p:spPr>
-        <p:txBody>
-          <a:bodyPr wrap="square">
-            <a:spAutoFit/>
-          </a:bodyPr>
-          <a:lstStyle/>
-          <a:p>
-            <a:pPr algn="ctr"/>
-            <a:r>
-              <a:rPr sz="2200" b="0" i="1">
-                <a:solidFill>
-                  <a:srgbClr val="8C8C8C"/>
-                </a:solidFill>
-                <a:latin typeface="Arial"/>
-              </a:rPr>
-              <a:t/>
             </a:r>
           </a:p>
         </p:txBody>
@@ -3855,8 +3645,8 @@
         </p:nvSpPr>
         <p:spPr>
           <a:xfrm>
-            <a:off x="594360" y="2258568"/>
-            <a:ext cx="11002975" cy="685800"/>
+            <a:off x="640080" y="2052828"/>
+            <a:ext cx="10911535" cy="731520"/>
           </a:xfrm>
           <a:prstGeom prst="rect">
             <a:avLst/>
@@ -3871,7 +3661,7 @@
           <a:p>
             <a:pPr algn="ctr"/>
             <a:r>
-              <a:rPr sz="4400" b="1" i="0">
+              <a:rPr sz="4800" b="1" i="0">
                 <a:solidFill>
                   <a:srgbClr val="FFFFFF"/>
                 </a:solidFill>
@@ -3890,8 +3680,8 @@
         </p:nvSpPr>
         <p:spPr>
           <a:xfrm>
-            <a:off x="594360" y="2980944"/>
-            <a:ext cx="11002975" cy="347472"/>
+            <a:off x="640080" y="2985516"/>
+            <a:ext cx="10911535" cy="731520"/>
           </a:xfrm>
           <a:prstGeom prst="rect">
             <a:avLst/>
@@ -3906,83 +3696,13 @@
           <a:p>
             <a:pPr algn="ctr"/>
             <a:r>
-              <a:rPr sz="2200" b="0" i="1">
-                <a:solidFill>
-                  <a:srgbClr val="8C8C8C"/>
-                </a:solidFill>
-                <a:latin typeface="Arial"/>
-              </a:rPr>
-              <a:t/>
-            </a:r>
-          </a:p>
-        </p:txBody>
-      </p:sp>
-      <p:sp>
-        <p:nvSpPr>
-          <p:cNvPr id="4" name="TextBox 3"/>
-          <p:cNvSpPr txBox="1"/>
-          <p:nvPr/>
-        </p:nvSpPr>
-        <p:spPr>
-          <a:xfrm>
-            <a:off x="594360" y="3529584"/>
-            <a:ext cx="11002975" cy="685800"/>
-          </a:xfrm>
-          <a:prstGeom prst="rect">
-            <a:avLst/>
-          </a:prstGeom>
-          <a:noFill/>
-        </p:spPr>
-        <p:txBody>
-          <a:bodyPr wrap="square">
-            <a:spAutoFit/>
-          </a:bodyPr>
-          <a:lstStyle/>
-          <a:p>
-            <a:pPr algn="ctr"/>
-            <a:r>
-              <a:rPr sz="4400" b="1" i="0">
+              <a:rPr sz="4800" b="1" i="0">
                 <a:solidFill>
                   <a:srgbClr val="FFFFFF"/>
                 </a:solidFill>
                 <a:latin typeface="Arial"/>
               </a:rPr>
               <a:t>Todo coração distante e partido</a:t>
-            </a:r>
-          </a:p>
-        </p:txBody>
-      </p:sp>
-      <p:sp>
-        <p:nvSpPr>
-          <p:cNvPr id="5" name="TextBox 4"/>
-          <p:cNvSpPr txBox="1"/>
-          <p:nvPr/>
-        </p:nvSpPr>
-        <p:spPr>
-          <a:xfrm>
-            <a:off x="594360" y="4251960"/>
-            <a:ext cx="11002975" cy="347472"/>
-          </a:xfrm>
-          <a:prstGeom prst="rect">
-            <a:avLst/>
-          </a:prstGeom>
-          <a:noFill/>
-        </p:spPr>
-        <p:txBody>
-          <a:bodyPr wrap="square">
-            <a:spAutoFit/>
-          </a:bodyPr>
-          <a:lstStyle/>
-          <a:p>
-            <a:pPr algn="ctr"/>
-            <a:r>
-              <a:rPr sz="2200" b="0" i="1">
-                <a:solidFill>
-                  <a:srgbClr val="8C8C8C"/>
-                </a:solidFill>
-                <a:latin typeface="Arial"/>
-              </a:rPr>
-              <a:t/>
             </a:r>
           </a:p>
         </p:txBody>
@@ -4021,8 +3741,8 @@
         </p:nvSpPr>
         <p:spPr>
           <a:xfrm>
-            <a:off x="594360" y="2894076"/>
-            <a:ext cx="11002975" cy="685800"/>
+            <a:off x="640080" y="2702052"/>
+            <a:ext cx="10911535" cy="731520"/>
           </a:xfrm>
           <a:prstGeom prst="rect">
             <a:avLst/>
@@ -4037,48 +3757,13 @@
           <a:p>
             <a:pPr algn="ctr"/>
             <a:r>
-              <a:rPr sz="4266" b="1" i="0">
+              <a:rPr sz="4600" b="1" i="0">
                 <a:solidFill>
                   <a:srgbClr val="FFFFFF"/>
                 </a:solidFill>
                 <a:latin typeface="Arial"/>
               </a:rPr>
               <a:t>Toda oração, todo braço estendido</a:t>
-            </a:r>
-          </a:p>
-        </p:txBody>
-      </p:sp>
-      <p:sp>
-        <p:nvSpPr>
-          <p:cNvPr id="3" name="TextBox 2"/>
-          <p:cNvSpPr txBox="1"/>
-          <p:nvPr/>
-        </p:nvSpPr>
-        <p:spPr>
-          <a:xfrm>
-            <a:off x="594360" y="3616452"/>
-            <a:ext cx="11002975" cy="347472"/>
-          </a:xfrm>
-          <a:prstGeom prst="rect">
-            <a:avLst/>
-          </a:prstGeom>
-          <a:noFill/>
-        </p:spPr>
-        <p:txBody>
-          <a:bodyPr wrap="square">
-            <a:spAutoFit/>
-          </a:bodyPr>
-          <a:lstStyle/>
-          <a:p>
-            <a:pPr algn="ctr"/>
-            <a:r>
-              <a:rPr sz="2200" b="0" i="1">
-                <a:solidFill>
-                  <a:srgbClr val="8C8C8C"/>
-                </a:solidFill>
-                <a:latin typeface="Arial"/>
-              </a:rPr>
-              <a:t/>
             </a:r>
           </a:p>
         </p:txBody>
@@ -4117,8 +3802,8 @@
         </p:nvSpPr>
         <p:spPr>
           <a:xfrm>
-            <a:off x="594360" y="2258568"/>
-            <a:ext cx="11002975" cy="685800"/>
+            <a:off x="640080" y="2052828"/>
+            <a:ext cx="10911535" cy="731520"/>
           </a:xfrm>
           <a:prstGeom prst="rect">
             <a:avLst/>
@@ -4133,7 +3818,7 @@
           <a:p>
             <a:pPr algn="ctr"/>
             <a:r>
-              <a:rPr sz="3705" b="1" i="0">
+              <a:rPr sz="4000" b="1" i="0">
                 <a:solidFill>
                   <a:srgbClr val="FFFFFF"/>
                 </a:solidFill>
@@ -4152,8 +3837,8 @@
         </p:nvSpPr>
         <p:spPr>
           <a:xfrm>
-            <a:off x="594360" y="2980944"/>
-            <a:ext cx="11002975" cy="347472"/>
+            <a:off x="640080" y="2985516"/>
+            <a:ext cx="10911535" cy="731520"/>
           </a:xfrm>
           <a:prstGeom prst="rect">
             <a:avLst/>
@@ -4168,83 +3853,13 @@
           <a:p>
             <a:pPr algn="ctr"/>
             <a:r>
-              <a:rPr sz="2200" b="0" i="1">
-                <a:solidFill>
-                  <a:srgbClr val="8C8C8C"/>
-                </a:solidFill>
-                <a:latin typeface="Arial"/>
-              </a:rPr>
-              <a:t/>
-            </a:r>
-          </a:p>
-        </p:txBody>
-      </p:sp>
-      <p:sp>
-        <p:nvSpPr>
-          <p:cNvPr id="4" name="TextBox 3"/>
-          <p:cNvSpPr txBox="1"/>
-          <p:nvPr/>
-        </p:nvSpPr>
-        <p:spPr>
-          <a:xfrm>
-            <a:off x="594360" y="3529584"/>
-            <a:ext cx="11002975" cy="685800"/>
-          </a:xfrm>
-          <a:prstGeom prst="rect">
-            <a:avLst/>
-          </a:prstGeom>
-          <a:noFill/>
-        </p:spPr>
-        <p:txBody>
-          <a:bodyPr wrap="square">
-            <a:spAutoFit/>
-          </a:bodyPr>
-          <a:lstStyle/>
-          <a:p>
-            <a:pPr algn="ctr"/>
-            <a:r>
-              <a:rPr sz="3805" b="1" i="0">
+              <a:rPr sz="4100" b="1" i="0">
                 <a:solidFill>
                   <a:srgbClr val="FFFFFF"/>
                 </a:solidFill>
                 <a:latin typeface="Arial"/>
               </a:rPr>
               <a:t>De era em era, Seus louvores ascendem</a:t>
-            </a:r>
-          </a:p>
-        </p:txBody>
-      </p:sp>
-      <p:sp>
-        <p:nvSpPr>
-          <p:cNvPr id="5" name="TextBox 4"/>
-          <p:cNvSpPr txBox="1"/>
-          <p:nvPr/>
-        </p:nvSpPr>
-        <p:spPr>
-          <a:xfrm>
-            <a:off x="594360" y="4251960"/>
-            <a:ext cx="11002975" cy="347472"/>
-          </a:xfrm>
-          <a:prstGeom prst="rect">
-            <a:avLst/>
-          </a:prstGeom>
-          <a:noFill/>
-        </p:spPr>
-        <p:txBody>
-          <a:bodyPr wrap="square">
-            <a:spAutoFit/>
-          </a:bodyPr>
-          <a:lstStyle/>
-          <a:p>
-            <a:pPr algn="ctr"/>
-            <a:r>
-              <a:rPr sz="2200" b="0" i="1">
-                <a:solidFill>
-                  <a:srgbClr val="8C8C8C"/>
-                </a:solidFill>
-                <a:latin typeface="Arial"/>
-              </a:rPr>
-              <a:t/>
             </a:r>
           </a:p>
         </p:txBody>
@@ -4283,8 +3898,8 @@
         </p:nvSpPr>
         <p:spPr>
           <a:xfrm>
-            <a:off x="594360" y="2258568"/>
-            <a:ext cx="11002975" cy="685800"/>
+            <a:off x="640080" y="2052828"/>
+            <a:ext cx="10911535" cy="731520"/>
           </a:xfrm>
           <a:prstGeom prst="rect">
             <a:avLst/>
@@ -4299,7 +3914,7 @@
           <a:p>
             <a:pPr algn="ctr"/>
             <a:r>
-              <a:rPr sz="4400" b="1" i="0">
+              <a:rPr sz="4800" b="1" i="0">
                 <a:solidFill>
                   <a:srgbClr val="FFFFFF"/>
                 </a:solidFill>
@@ -4318,8 +3933,8 @@
         </p:nvSpPr>
         <p:spPr>
           <a:xfrm>
-            <a:off x="594360" y="2980944"/>
-            <a:ext cx="11002975" cy="347472"/>
+            <a:off x="640080" y="2985516"/>
+            <a:ext cx="10911535" cy="731520"/>
           </a:xfrm>
           <a:prstGeom prst="rect">
             <a:avLst/>
@@ -4334,83 +3949,13 @@
           <a:p>
             <a:pPr algn="ctr"/>
             <a:r>
-              <a:rPr sz="2200" b="0" i="1">
-                <a:solidFill>
-                  <a:srgbClr val="8C8C8C"/>
-                </a:solidFill>
-                <a:latin typeface="Arial"/>
-              </a:rPr>
-              <a:t/>
-            </a:r>
-          </a:p>
-        </p:txBody>
-      </p:sp>
-      <p:sp>
-        <p:nvSpPr>
-          <p:cNvPr id="4" name="TextBox 3"/>
-          <p:cNvSpPr txBox="1"/>
-          <p:nvPr/>
-        </p:nvSpPr>
-        <p:spPr>
-          <a:xfrm>
-            <a:off x="594360" y="3529584"/>
-            <a:ext cx="11002975" cy="685800"/>
-          </a:xfrm>
-          <a:prstGeom prst="rect">
-            <a:avLst/>
-          </a:prstGeom>
-          <a:noFill/>
-        </p:spPr>
-        <p:txBody>
-          <a:bodyPr wrap="square">
-            <a:spAutoFit/>
-          </a:bodyPr>
-          <a:lstStyle/>
-          <a:p>
-            <a:pPr algn="ctr"/>
-            <a:r>
-              <a:rPr sz="3911" b="1" i="0">
+              <a:rPr sz="4200" b="1" i="0">
                 <a:solidFill>
                   <a:srgbClr val="FFFFFF"/>
                 </a:solidFill>
                 <a:latin typeface="Arial"/>
               </a:rPr>
               <a:t>Salvador Jesus, para sempre e depois</a:t>
-            </a:r>
-          </a:p>
-        </p:txBody>
-      </p:sp>
-      <p:sp>
-        <p:nvSpPr>
-          <p:cNvPr id="5" name="TextBox 4"/>
-          <p:cNvSpPr txBox="1"/>
-          <p:nvPr/>
-        </p:nvSpPr>
-        <p:spPr>
-          <a:xfrm>
-            <a:off x="594360" y="4251960"/>
-            <a:ext cx="11002975" cy="347472"/>
-          </a:xfrm>
-          <a:prstGeom prst="rect">
-            <a:avLst/>
-          </a:prstGeom>
-          <a:noFill/>
-        </p:spPr>
-        <p:txBody>
-          <a:bodyPr wrap="square">
-            <a:spAutoFit/>
-          </a:bodyPr>
-          <a:lstStyle/>
-          <a:p>
-            <a:pPr algn="ctr"/>
-            <a:r>
-              <a:rPr sz="2200" b="0" i="1">
-                <a:solidFill>
-                  <a:srgbClr val="8C8C8C"/>
-                </a:solidFill>
-                <a:latin typeface="Arial"/>
-              </a:rPr>
-              <a:t/>
             </a:r>
           </a:p>
         </p:txBody>
@@ -4449,8 +3994,8 @@
         </p:nvSpPr>
         <p:spPr>
           <a:xfrm>
-            <a:off x="594360" y="2258568"/>
-            <a:ext cx="11002975" cy="685800"/>
+            <a:off x="640080" y="2052828"/>
+            <a:ext cx="10911535" cy="731520"/>
           </a:xfrm>
           <a:prstGeom prst="rect">
             <a:avLst/>
@@ -4465,7 +4010,7 @@
           <a:p>
             <a:pPr algn="ctr"/>
             <a:r>
-              <a:rPr sz="4400" b="1" i="0">
+              <a:rPr sz="4800" b="1" i="0">
                 <a:solidFill>
                   <a:srgbClr val="FFFFFF"/>
                 </a:solidFill>
@@ -4484,8 +4029,8 @@
         </p:nvSpPr>
         <p:spPr>
           <a:xfrm>
-            <a:off x="594360" y="2980944"/>
-            <a:ext cx="11002975" cy="347472"/>
+            <a:off x="640080" y="2985516"/>
+            <a:ext cx="10911535" cy="731520"/>
           </a:xfrm>
           <a:prstGeom prst="rect">
             <a:avLst/>
@@ -4500,83 +4045,13 @@
           <a:p>
             <a:pPr algn="ctr"/>
             <a:r>
-              <a:rPr sz="2200" b="0" i="1">
-                <a:solidFill>
-                  <a:srgbClr val="8C8C8C"/>
-                </a:solidFill>
-                <a:latin typeface="Arial"/>
-              </a:rPr>
-              <a:t/>
-            </a:r>
-          </a:p>
-        </p:txBody>
-      </p:sp>
-      <p:sp>
-        <p:nvSpPr>
-          <p:cNvPr id="4" name="TextBox 3"/>
-          <p:cNvSpPr txBox="1"/>
-          <p:nvPr/>
-        </p:nvSpPr>
-        <p:spPr>
-          <a:xfrm>
-            <a:off x="594360" y="3529584"/>
-            <a:ext cx="11002975" cy="685800"/>
-          </a:xfrm>
-          <a:prstGeom prst="rect">
-            <a:avLst/>
-          </a:prstGeom>
-          <a:noFill/>
-        </p:spPr>
-        <p:txBody>
-          <a:bodyPr wrap="square">
-            <a:spAutoFit/>
-          </a:bodyPr>
-          <a:lstStyle/>
-          <a:p>
-            <a:pPr algn="ctr"/>
-            <a:r>
-              <a:rPr sz="4400" b="1" i="0">
+              <a:rPr sz="4800" b="1" i="0">
                 <a:solidFill>
                   <a:srgbClr val="FFFFFF"/>
                 </a:solidFill>
                 <a:latin typeface="Arial"/>
               </a:rPr>
               <a:t>Na luz de tudo o que Ele fez</a:t>
-            </a:r>
-          </a:p>
-        </p:txBody>
-      </p:sp>
-      <p:sp>
-        <p:nvSpPr>
-          <p:cNvPr id="5" name="TextBox 4"/>
-          <p:cNvSpPr txBox="1"/>
-          <p:nvPr/>
-        </p:nvSpPr>
-        <p:spPr>
-          <a:xfrm>
-            <a:off x="594360" y="4251960"/>
-            <a:ext cx="11002975" cy="347472"/>
-          </a:xfrm>
-          <a:prstGeom prst="rect">
-            <a:avLst/>
-          </a:prstGeom>
-          <a:noFill/>
-        </p:spPr>
-        <p:txBody>
-          <a:bodyPr wrap="square">
-            <a:spAutoFit/>
-          </a:bodyPr>
-          <a:lstStyle/>
-          <a:p>
-            <a:pPr algn="ctr"/>
-            <a:r>
-              <a:rPr sz="2200" b="0" i="1">
-                <a:solidFill>
-                  <a:srgbClr val="8C8C8C"/>
-                </a:solidFill>
-                <a:latin typeface="Arial"/>
-              </a:rPr>
-              <a:t/>
             </a:r>
           </a:p>
         </p:txBody>
@@ -4615,8 +4090,8 @@
         </p:nvSpPr>
         <p:spPr>
           <a:xfrm>
-            <a:off x="594360" y="2258568"/>
-            <a:ext cx="11002975" cy="685800"/>
+            <a:off x="640080" y="2052828"/>
+            <a:ext cx="10911535" cy="731520"/>
           </a:xfrm>
           <a:prstGeom prst="rect">
             <a:avLst/>
@@ -4631,7 +4106,7 @@
           <a:p>
             <a:pPr algn="ctr"/>
             <a:r>
-              <a:rPr sz="4022" b="1" i="0">
+              <a:rPr sz="4300" b="1" i="0">
                 <a:solidFill>
                   <a:srgbClr val="FFFFFF"/>
                 </a:solidFill>
@@ -4650,8 +4125,8 @@
         </p:nvSpPr>
         <p:spPr>
           <a:xfrm>
-            <a:off x="594360" y="2980944"/>
-            <a:ext cx="11002975" cy="347472"/>
+            <a:off x="640080" y="2985516"/>
+            <a:ext cx="10911535" cy="731520"/>
           </a:xfrm>
           <a:prstGeom prst="rect">
             <a:avLst/>
@@ -4666,83 +4141,13 @@
           <a:p>
             <a:pPr algn="ctr"/>
             <a:r>
-              <a:rPr sz="2200" b="0" i="1">
-                <a:solidFill>
-                  <a:srgbClr val="8C8C8C"/>
-                </a:solidFill>
-                <a:latin typeface="Arial"/>
-              </a:rPr>
-              <a:t/>
-            </a:r>
-          </a:p>
-        </p:txBody>
-      </p:sp>
-      <p:sp>
-        <p:nvSpPr>
-          <p:cNvPr id="4" name="TextBox 3"/>
-          <p:cNvSpPr txBox="1"/>
-          <p:nvPr/>
-        </p:nvSpPr>
-        <p:spPr>
-          <a:xfrm>
-            <a:off x="594360" y="3529584"/>
-            <a:ext cx="11002975" cy="685800"/>
-          </a:xfrm>
-          <a:prstGeom prst="rect">
-            <a:avLst/>
-          </a:prstGeom>
-          <a:noFill/>
-        </p:spPr>
-        <p:txBody>
-          <a:bodyPr wrap="square">
-            <a:spAutoFit/>
-          </a:bodyPr>
-          <a:lstStyle/>
-          <a:p>
-            <a:pPr algn="ctr"/>
-            <a:r>
-              <a:rPr sz="4400" b="1" i="0">
+              <a:rPr sz="4800" b="1" i="0">
                 <a:solidFill>
                   <a:srgbClr val="FFFFFF"/>
                 </a:solidFill>
                 <a:latin typeface="Arial"/>
               </a:rPr>
               <a:t>Na maravilha do Seu amor</a:t>
-            </a:r>
-          </a:p>
-        </p:txBody>
-      </p:sp>
-      <p:sp>
-        <p:nvSpPr>
-          <p:cNvPr id="5" name="TextBox 4"/>
-          <p:cNvSpPr txBox="1"/>
-          <p:nvPr/>
-        </p:nvSpPr>
-        <p:spPr>
-          <a:xfrm>
-            <a:off x="594360" y="4251960"/>
-            <a:ext cx="11002975" cy="347472"/>
-          </a:xfrm>
-          <a:prstGeom prst="rect">
-            <a:avLst/>
-          </a:prstGeom>
-          <a:noFill/>
-        </p:spPr>
-        <p:txBody>
-          <a:bodyPr wrap="square">
-            <a:spAutoFit/>
-          </a:bodyPr>
-          <a:lstStyle/>
-          <a:p>
-            <a:pPr algn="ctr"/>
-            <a:r>
-              <a:rPr sz="2200" b="0" i="1">
-                <a:solidFill>
-                  <a:srgbClr val="8C8C8C"/>
-                </a:solidFill>
-                <a:latin typeface="Arial"/>
-              </a:rPr>
-              <a:t/>
             </a:r>
           </a:p>
         </p:txBody>
@@ -4781,8 +4186,8 @@
         </p:nvSpPr>
         <p:spPr>
           <a:xfrm>
-            <a:off x="594360" y="1837944"/>
-            <a:ext cx="11002975" cy="685800"/>
+            <a:off x="640080" y="1650492"/>
+            <a:ext cx="10911535" cy="731520"/>
           </a:xfrm>
           <a:prstGeom prst="rect">
             <a:avLst/>
@@ -4797,7 +4202,7 @@
           <a:p>
             <a:pPr algn="ctr"/>
             <a:r>
-              <a:rPr sz="4400" b="1" i="0">
+              <a:rPr sz="4800" b="1" i="0">
                 <a:solidFill>
                   <a:srgbClr val="FFFFFF"/>
                 </a:solidFill>
@@ -4816,8 +4221,8 @@
         </p:nvSpPr>
         <p:spPr>
           <a:xfrm>
-            <a:off x="594360" y="2560320"/>
-            <a:ext cx="11002975" cy="384048"/>
+            <a:off x="640080" y="2418588"/>
+            <a:ext cx="10911535" cy="365760"/>
           </a:xfrm>
           <a:prstGeom prst="rect">
             <a:avLst/>
@@ -4834,7 +4239,7 @@
             <a:r>
               <a:rPr sz="2400" b="0" i="1">
                 <a:solidFill>
-                  <a:srgbClr val="B4B4B4"/>
+                  <a:srgbClr val="AAAAAA"/>
                 </a:solidFill>
                 <a:latin typeface="Arial"/>
               </a:rPr>
@@ -4851,8 +4256,8 @@
         </p:nvSpPr>
         <p:spPr>
           <a:xfrm>
-            <a:off x="594360" y="2980944"/>
-            <a:ext cx="11002975" cy="347472"/>
+            <a:off x="640080" y="2985516"/>
+            <a:ext cx="10911535" cy="731520"/>
           </a:xfrm>
           <a:prstGeom prst="rect">
             <a:avLst/>
@@ -4867,13 +4272,13 @@
           <a:p>
             <a:pPr algn="ctr"/>
             <a:r>
-              <a:rPr sz="2000" b="0" i="1">
-                <a:solidFill>
-                  <a:srgbClr val="8C8C8C"/>
+              <a:rPr sz="4800" b="1" i="0">
+                <a:solidFill>
+                  <a:srgbClr val="FFFFFF"/>
                 </a:solidFill>
                 <a:latin typeface="Arial"/>
               </a:rPr>
-              <a:t/>
+              <a:t>その目は  主を  見上げる</a:t>
             </a:r>
           </a:p>
         </p:txBody>
@@ -4886,8 +4291,8 @@
         </p:nvSpPr>
         <p:spPr>
           <a:xfrm>
-            <a:off x="594360" y="3529584"/>
-            <a:ext cx="11002975" cy="685800"/>
+            <a:off x="640080" y="3753612"/>
+            <a:ext cx="10911535" cy="365760"/>
           </a:xfrm>
           <a:prstGeom prst="rect">
             <a:avLst/>
@@ -4902,13 +4307,13 @@
           <a:p>
             <a:pPr algn="ctr"/>
             <a:r>
-              <a:rPr sz="4400" b="1" i="0">
-                <a:solidFill>
-                  <a:srgbClr val="FFFFFF"/>
+              <a:rPr sz="2400" b="0" i="1">
+                <a:solidFill>
+                  <a:srgbClr val="AAAAAA"/>
                 </a:solidFill>
                 <a:latin typeface="Arial"/>
               </a:rPr>
-              <a:t>その目は  主を  見上げる</a:t>
+              <a:t>sono me wa shu wo miageru</a:t>
             </a:r>
           </a:p>
         </p:txBody>
@@ -4921,8 +4326,8 @@
         </p:nvSpPr>
         <p:spPr>
           <a:xfrm>
-            <a:off x="594360" y="4251960"/>
-            <a:ext cx="11002975" cy="384048"/>
+            <a:off x="640080" y="4530852"/>
+            <a:ext cx="10911535" cy="310896"/>
           </a:xfrm>
           <a:prstGeom prst="rect">
             <a:avLst/>
@@ -4937,13 +4342,13 @@
           <a:p>
             <a:pPr algn="ctr"/>
             <a:r>
-              <a:rPr sz="2400" b="0" i="1">
-                <a:solidFill>
-                  <a:srgbClr val="B4B4B4"/>
+              <a:rPr sz="2000" b="0" i="1">
+                <a:solidFill>
+                  <a:srgbClr val="828282"/>
                 </a:solidFill>
                 <a:latin typeface="Arial"/>
               </a:rPr>
-              <a:t>sono me wa shu wo miageru</a:t>
+              <a:t>Toda nação e toda língua</a:t>
             </a:r>
           </a:p>
         </p:txBody>
@@ -4956,8 +4361,8 @@
         </p:nvSpPr>
         <p:spPr>
           <a:xfrm>
-            <a:off x="594360" y="4672584"/>
-            <a:ext cx="11002975" cy="347472"/>
+            <a:off x="640080" y="4896612"/>
+            <a:ext cx="10911535" cy="310896"/>
           </a:xfrm>
           <a:prstGeom prst="rect">
             <a:avLst/>
@@ -4974,11 +4379,11 @@
             <a:r>
               <a:rPr sz="2000" b="0" i="1">
                 <a:solidFill>
-                  <a:srgbClr val="8C8C8C"/>
+                  <a:srgbClr val="828282"/>
                 </a:solidFill>
                 <a:latin typeface="Arial"/>
               </a:rPr>
-              <a:t/>
+              <a:t>Venha descobrir a esperança no amor do Pai</a:t>
             </a:r>
           </a:p>
         </p:txBody>
@@ -5017,8 +4422,8 @@
         </p:nvSpPr>
         <p:spPr>
           <a:xfrm>
-            <a:off x="594360" y="2683764"/>
-            <a:ext cx="11002975" cy="685800"/>
+            <a:off x="640080" y="2500884"/>
+            <a:ext cx="10911535" cy="731520"/>
           </a:xfrm>
           <a:prstGeom prst="rect">
             <a:avLst/>
@@ -5033,7 +4438,7 @@
           <a:p>
             <a:pPr algn="ctr"/>
             <a:r>
-              <a:rPr sz="4400" b="1" i="0">
+              <a:rPr sz="4800" b="1" i="0">
                 <a:solidFill>
                   <a:srgbClr val="FFFFFF"/>
                 </a:solidFill>
@@ -5052,8 +4457,8 @@
         </p:nvSpPr>
         <p:spPr>
           <a:xfrm>
-            <a:off x="594360" y="3406140"/>
-            <a:ext cx="11002975" cy="384048"/>
+            <a:off x="640080" y="3268980"/>
+            <a:ext cx="10911535" cy="365760"/>
           </a:xfrm>
           <a:prstGeom prst="rect">
             <a:avLst/>
@@ -5070,7 +4475,7 @@
             <a:r>
               <a:rPr sz="2400" b="0" i="1">
                 <a:solidFill>
-                  <a:srgbClr val="B4B4B4"/>
+                  <a:srgbClr val="AAAAAA"/>
                 </a:solidFill>
                 <a:latin typeface="Arial"/>
               </a:rPr>
@@ -5087,8 +4492,8 @@
         </p:nvSpPr>
         <p:spPr>
           <a:xfrm>
-            <a:off x="594360" y="3826764"/>
-            <a:ext cx="11002975" cy="347472"/>
+            <a:off x="640080" y="4046220"/>
+            <a:ext cx="10911535" cy="310896"/>
           </a:xfrm>
           <a:prstGeom prst="rect">
             <a:avLst/>
@@ -5105,11 +4510,11 @@
             <a:r>
               <a:rPr sz="2000" b="0" i="1">
                 <a:solidFill>
-                  <a:srgbClr val="8C8C8C"/>
+                  <a:srgbClr val="828282"/>
                 </a:solidFill>
                 <a:latin typeface="Arial"/>
               </a:rPr>
-              <a:t/>
+              <a:t>Toda a criação se curvará como uma</a:t>
             </a:r>
           </a:p>
         </p:txBody>
@@ -5148,8 +4553,8 @@
         </p:nvSpPr>
         <p:spPr>
           <a:xfrm>
-            <a:off x="594360" y="1837944"/>
-            <a:ext cx="11002975" cy="685800"/>
+            <a:off x="640080" y="1650492"/>
+            <a:ext cx="10911535" cy="731520"/>
           </a:xfrm>
           <a:prstGeom prst="rect">
             <a:avLst/>
@@ -5164,7 +4569,7 @@
           <a:p>
             <a:pPr algn="ctr"/>
             <a:r>
-              <a:rPr sz="4400" b="1" i="0">
+              <a:rPr sz="4800" b="1" i="0">
                 <a:solidFill>
                   <a:srgbClr val="FFFFFF"/>
                 </a:solidFill>
@@ -5183,8 +4588,8 @@
         </p:nvSpPr>
         <p:spPr>
           <a:xfrm>
-            <a:off x="594360" y="2560320"/>
-            <a:ext cx="11002975" cy="384048"/>
+            <a:off x="640080" y="2418588"/>
+            <a:ext cx="10911535" cy="365760"/>
           </a:xfrm>
           <a:prstGeom prst="rect">
             <a:avLst/>
@@ -5201,7 +4606,7 @@
             <a:r>
               <a:rPr sz="2400" b="0" i="1">
                 <a:solidFill>
-                  <a:srgbClr val="B4B4B4"/>
+                  <a:srgbClr val="AAAAAA"/>
                 </a:solidFill>
                 <a:latin typeface="Arial"/>
               </a:rPr>
@@ -5218,8 +4623,8 @@
         </p:nvSpPr>
         <p:spPr>
           <a:xfrm>
-            <a:off x="594360" y="2980944"/>
-            <a:ext cx="11002975" cy="347472"/>
+            <a:off x="640080" y="2985516"/>
+            <a:ext cx="10911535" cy="731520"/>
           </a:xfrm>
           <a:prstGeom prst="rect">
             <a:avLst/>
@@ -5234,13 +4639,13 @@
           <a:p>
             <a:pPr algn="ctr"/>
             <a:r>
-              <a:rPr sz="2000" b="0" i="1">
-                <a:solidFill>
-                  <a:srgbClr val="8C8C8C"/>
+              <a:rPr sz="4800" b="1" i="0">
+                <a:solidFill>
+                  <a:srgbClr val="FFFFFF"/>
                 </a:solidFill>
                 <a:latin typeface="Arial"/>
               </a:rPr>
-              <a:t/>
+              <a:t>声の限り 讃えたい</a:t>
             </a:r>
           </a:p>
         </p:txBody>
@@ -5253,8 +4658,8 @@
         </p:nvSpPr>
         <p:spPr>
           <a:xfrm>
-            <a:off x="594360" y="3529584"/>
-            <a:ext cx="11002975" cy="685800"/>
+            <a:off x="640080" y="3753612"/>
+            <a:ext cx="10911535" cy="365760"/>
           </a:xfrm>
           <a:prstGeom prst="rect">
             <a:avLst/>
@@ -5269,13 +4674,13 @@
           <a:p>
             <a:pPr algn="ctr"/>
             <a:r>
-              <a:rPr sz="4400" b="1" i="0">
-                <a:solidFill>
-                  <a:srgbClr val="FFFFFF"/>
+              <a:rPr sz="2400" b="0" i="1">
+                <a:solidFill>
+                  <a:srgbClr val="AAAAAA"/>
                 </a:solidFill>
                 <a:latin typeface="Arial"/>
               </a:rPr>
-              <a:t>声の限り 讃えたい</a:t>
+              <a:t>koe no kagiri tataetai</a:t>
             </a:r>
           </a:p>
         </p:txBody>
@@ -5288,8 +4693,8 @@
         </p:nvSpPr>
         <p:spPr>
           <a:xfrm>
-            <a:off x="594360" y="4251960"/>
-            <a:ext cx="11002975" cy="384048"/>
+            <a:off x="640080" y="4530852"/>
+            <a:ext cx="10911535" cy="310896"/>
           </a:xfrm>
           <a:prstGeom prst="rect">
             <a:avLst/>
@@ -5304,13 +4709,13 @@
           <a:p>
             <a:pPr algn="ctr"/>
             <a:r>
-              <a:rPr sz="2400" b="0" i="1">
-                <a:solidFill>
-                  <a:srgbClr val="B4B4B4"/>
+              <a:rPr sz="2000" b="0" i="1">
+                <a:solidFill>
+                  <a:srgbClr val="828282"/>
                 </a:solidFill>
                 <a:latin typeface="Arial"/>
               </a:rPr>
-              <a:t>koe no kagiri tataetai</a:t>
+              <a:t>Veja o Filho ressuscitado</a:t>
             </a:r>
           </a:p>
         </p:txBody>
@@ -5323,8 +4728,8 @@
         </p:nvSpPr>
         <p:spPr>
           <a:xfrm>
-            <a:off x="594360" y="4672584"/>
-            <a:ext cx="11002975" cy="347472"/>
+            <a:off x="640080" y="4896612"/>
+            <a:ext cx="10911535" cy="310896"/>
           </a:xfrm>
           <a:prstGeom prst="rect">
             <a:avLst/>
@@ -5341,11 +4746,11 @@
             <a:r>
               <a:rPr sz="2000" b="0" i="1">
                 <a:solidFill>
-                  <a:srgbClr val="8C8C8C"/>
+                  <a:srgbClr val="828282"/>
                 </a:solidFill>
                 <a:latin typeface="Arial"/>
               </a:rPr>
-              <a:t/>
+              <a:t>Jesus Salvador, para todo o sempre</a:t>
             </a:r>
           </a:p>
         </p:txBody>
@@ -5384,8 +4789,8 @@
         </p:nvSpPr>
         <p:spPr>
           <a:xfrm>
-            <a:off x="594360" y="1837944"/>
-            <a:ext cx="11002975" cy="685800"/>
+            <a:off x="640080" y="1650492"/>
+            <a:ext cx="10911535" cy="731520"/>
           </a:xfrm>
           <a:prstGeom prst="rect">
             <a:avLst/>
@@ -5400,7 +4805,7 @@
           <a:p>
             <a:pPr algn="ctr"/>
             <a:r>
-              <a:rPr sz="4400" b="1" i="0">
+              <a:rPr sz="4800" b="1" i="0">
                 <a:solidFill>
                   <a:srgbClr val="FFFFFF"/>
                 </a:solidFill>
@@ -5419,8 +4824,8 @@
         </p:nvSpPr>
         <p:spPr>
           <a:xfrm>
-            <a:off x="594360" y="2560320"/>
-            <a:ext cx="11002975" cy="384048"/>
+            <a:off x="640080" y="2418588"/>
+            <a:ext cx="10911535" cy="365760"/>
           </a:xfrm>
           <a:prstGeom prst="rect">
             <a:avLst/>
@@ -5437,7 +4842,7 @@
             <a:r>
               <a:rPr sz="2400" b="0" i="1">
                 <a:solidFill>
-                  <a:srgbClr val="B4B4B4"/>
+                  <a:srgbClr val="AAAAAA"/>
                 </a:solidFill>
                 <a:latin typeface="Arial"/>
               </a:rPr>
@@ -5454,8 +4859,8 @@
         </p:nvSpPr>
         <p:spPr>
           <a:xfrm>
-            <a:off x="594360" y="2980944"/>
-            <a:ext cx="11002975" cy="347472"/>
+            <a:off x="640080" y="2985516"/>
+            <a:ext cx="10911535" cy="731520"/>
           </a:xfrm>
           <a:prstGeom prst="rect">
             <a:avLst/>
@@ -5470,13 +4875,13 @@
           <a:p>
             <a:pPr algn="ctr"/>
             <a:r>
-              <a:rPr sz="2000" b="0" i="1">
-                <a:solidFill>
-                  <a:srgbClr val="8C8C8C"/>
+              <a:rPr sz="4800" b="1" i="0">
+                <a:solidFill>
+                  <a:srgbClr val="FFFFFF"/>
                 </a:solidFill>
                 <a:latin typeface="Arial"/>
               </a:rPr>
-              <a:t/>
+              <a:t>神は愛           神は愛</a:t>
             </a:r>
           </a:p>
         </p:txBody>
@@ -5489,8 +4894,8 @@
         </p:nvSpPr>
         <p:spPr>
           <a:xfrm>
-            <a:off x="594360" y="3529584"/>
-            <a:ext cx="11002975" cy="685800"/>
+            <a:off x="640080" y="3753612"/>
+            <a:ext cx="10911535" cy="365760"/>
           </a:xfrm>
           <a:prstGeom prst="rect">
             <a:avLst/>
@@ -5505,13 +4910,13 @@
           <a:p>
             <a:pPr algn="ctr"/>
             <a:r>
-              <a:rPr sz="4400" b="1" i="0">
-                <a:solidFill>
-                  <a:srgbClr val="FFFFFF"/>
+              <a:rPr sz="2400" b="0" i="1">
+                <a:solidFill>
+                  <a:srgbClr val="AAAAAA"/>
                 </a:solidFill>
                 <a:latin typeface="Arial"/>
               </a:rPr>
-              <a:t>神は愛           神は愛</a:t>
+              <a:t>kami wa ai           kami wa ai</a:t>
             </a:r>
           </a:p>
         </p:txBody>
@@ -5524,8 +4929,8 @@
         </p:nvSpPr>
         <p:spPr>
           <a:xfrm>
-            <a:off x="594360" y="4251960"/>
-            <a:ext cx="11002975" cy="384048"/>
+            <a:off x="640080" y="4530852"/>
+            <a:ext cx="10911535" cy="310896"/>
           </a:xfrm>
           <a:prstGeom prst="rect">
             <a:avLst/>
@@ -5540,13 +4945,13 @@
           <a:p>
             <a:pPr algn="ctr"/>
             <a:r>
-              <a:rPr sz="2400" b="0" i="1">
-                <a:solidFill>
-                  <a:srgbClr val="B4B4B4"/>
+              <a:rPr sz="2000" b="0" i="1">
+                <a:solidFill>
+                  <a:srgbClr val="828282"/>
                 </a:solidFill>
                 <a:latin typeface="Arial"/>
               </a:rPr>
-              <a:t>kami wa ai           kami wa ai</a:t>
+              <a:t>Isso é amor</a:t>
             </a:r>
           </a:p>
         </p:txBody>
@@ -5559,8 +4964,8 @@
         </p:nvSpPr>
         <p:spPr>
           <a:xfrm>
-            <a:off x="594360" y="4672584"/>
-            <a:ext cx="11002975" cy="347472"/>
+            <a:off x="640080" y="4896612"/>
+            <a:ext cx="10911535" cy="310896"/>
           </a:xfrm>
           <a:prstGeom prst="rect">
             <a:avLst/>
@@ -5577,11 +4982,11 @@
             <a:r>
               <a:rPr sz="2000" b="0" i="1">
                 <a:solidFill>
-                  <a:srgbClr val="8C8C8C"/>
+                  <a:srgbClr val="828282"/>
                 </a:solidFill>
                 <a:latin typeface="Arial"/>
               </a:rPr>
-              <a:t/>
+              <a:t>Jesus veio e morreu</a:t>
             </a:r>
           </a:p>
         </p:txBody>
@@ -5620,8 +5025,8 @@
         </p:nvSpPr>
         <p:spPr>
           <a:xfrm>
-            <a:off x="594360" y="2258568"/>
-            <a:ext cx="11002975" cy="685800"/>
+            <a:off x="640080" y="2052828"/>
+            <a:ext cx="10911535" cy="731520"/>
           </a:xfrm>
           <a:prstGeom prst="rect">
             <a:avLst/>
@@ -5636,7 +5041,7 @@
           <a:p>
             <a:pPr algn="ctr"/>
             <a:r>
-              <a:rPr sz="4400" b="1" i="0">
+              <a:rPr sz="4800" b="1" i="0">
                 <a:solidFill>
                   <a:srgbClr val="FFFFFF"/>
                 </a:solidFill>
@@ -5655,8 +5060,8 @@
         </p:nvSpPr>
         <p:spPr>
           <a:xfrm>
-            <a:off x="594360" y="2980944"/>
-            <a:ext cx="11002975" cy="347472"/>
+            <a:off x="640080" y="2985516"/>
+            <a:ext cx="10911535" cy="731520"/>
           </a:xfrm>
           <a:prstGeom prst="rect">
             <a:avLst/>
@@ -5671,83 +5076,13 @@
           <a:p>
             <a:pPr algn="ctr"/>
             <a:r>
-              <a:rPr sz="2200" b="0" i="1">
-                <a:solidFill>
-                  <a:srgbClr val="8C8C8C"/>
-                </a:solidFill>
-                <a:latin typeface="Arial"/>
-              </a:rPr>
-              <a:t/>
-            </a:r>
-          </a:p>
-        </p:txBody>
-      </p:sp>
-      <p:sp>
-        <p:nvSpPr>
-          <p:cNvPr id="4" name="TextBox 3"/>
-          <p:cNvSpPr txBox="1"/>
-          <p:nvPr/>
-        </p:nvSpPr>
-        <p:spPr>
-          <a:xfrm>
-            <a:off x="594360" y="3529584"/>
-            <a:ext cx="11002975" cy="685800"/>
-          </a:xfrm>
-          <a:prstGeom prst="rect">
-            <a:avLst/>
-          </a:prstGeom>
-          <a:noFill/>
-        </p:spPr>
-        <p:txBody>
-          <a:bodyPr wrap="square">
-            <a:spAutoFit/>
-          </a:bodyPr>
-          <a:lstStyle/>
-          <a:p>
-            <a:pPr algn="ctr"/>
-            <a:r>
-              <a:rPr sz="4022" b="1" i="0">
+              <a:rPr sz="4300" b="1" i="0">
                 <a:solidFill>
                   <a:srgbClr val="FFFFFF"/>
                 </a:solidFill>
                 <a:latin typeface="Arial"/>
               </a:rPr>
               <a:t>Toda alma e todo coração palpitante</a:t>
-            </a:r>
-          </a:p>
-        </p:txBody>
-      </p:sp>
-      <p:sp>
-        <p:nvSpPr>
-          <p:cNvPr id="5" name="TextBox 4"/>
-          <p:cNvSpPr txBox="1"/>
-          <p:nvPr/>
-        </p:nvSpPr>
-        <p:spPr>
-          <a:xfrm>
-            <a:off x="594360" y="4251960"/>
-            <a:ext cx="11002975" cy="347472"/>
-          </a:xfrm>
-          <a:prstGeom prst="rect">
-            <a:avLst/>
-          </a:prstGeom>
-          <a:noFill/>
-        </p:spPr>
-        <p:txBody>
-          <a:bodyPr wrap="square">
-            <a:spAutoFit/>
-          </a:bodyPr>
-          <a:lstStyle/>
-          <a:p>
-            <a:pPr algn="ctr"/>
-            <a:r>
-              <a:rPr sz="2200" b="0" i="1">
-                <a:solidFill>
-                  <a:srgbClr val="8C8C8C"/>
-                </a:solidFill>
-                <a:latin typeface="Arial"/>
-              </a:rPr>
-              <a:t/>
             </a:r>
           </a:p>
         </p:txBody>
@@ -5786,8 +5121,8 @@
         </p:nvSpPr>
         <p:spPr>
           <a:xfrm>
-            <a:off x="594360" y="2258568"/>
-            <a:ext cx="11002975" cy="685800"/>
+            <a:off x="640080" y="2052828"/>
+            <a:ext cx="10911535" cy="731520"/>
           </a:xfrm>
           <a:prstGeom prst="rect">
             <a:avLst/>
@@ -5802,7 +5137,7 @@
           <a:p>
             <a:pPr algn="ctr"/>
             <a:r>
-              <a:rPr sz="4400" b="1" i="0">
+              <a:rPr sz="4800" b="1" i="0">
                 <a:solidFill>
                   <a:srgbClr val="FFFFFF"/>
                 </a:solidFill>
@@ -5821,8 +5156,8 @@
         </p:nvSpPr>
         <p:spPr>
           <a:xfrm>
-            <a:off x="594360" y="2980944"/>
-            <a:ext cx="11002975" cy="347472"/>
+            <a:off x="640080" y="2985516"/>
+            <a:ext cx="10911535" cy="731520"/>
           </a:xfrm>
           <a:prstGeom prst="rect">
             <a:avLst/>
@@ -5837,83 +5172,13 @@
           <a:p>
             <a:pPr algn="ctr"/>
             <a:r>
-              <a:rPr sz="2200" b="0" i="1">
-                <a:solidFill>
-                  <a:srgbClr val="8C8C8C"/>
-                </a:solidFill>
-                <a:latin typeface="Arial"/>
-              </a:rPr>
-              <a:t/>
-            </a:r>
-          </a:p>
-        </p:txBody>
-      </p:sp>
-      <p:sp>
-        <p:nvSpPr>
-          <p:cNvPr id="4" name="TextBox 3"/>
-          <p:cNvSpPr txBox="1"/>
-          <p:nvPr/>
-        </p:nvSpPr>
-        <p:spPr>
-          <a:xfrm>
-            <a:off x="594360" y="3529584"/>
-            <a:ext cx="11002975" cy="685800"/>
-          </a:xfrm>
-          <a:prstGeom prst="rect">
-            <a:avLst/>
-          </a:prstGeom>
-          <a:noFill/>
-        </p:spPr>
-        <p:txBody>
-          <a:bodyPr wrap="square">
-            <a:spAutoFit/>
-          </a:bodyPr>
-          <a:lstStyle/>
-          <a:p>
-            <a:pPr algn="ctr"/>
-            <a:r>
-              <a:rPr sz="3352" b="1" i="0">
+              <a:rPr sz="3600" b="1" i="0">
                 <a:solidFill>
                   <a:srgbClr val="FFFFFF"/>
                 </a:solidFill>
                 <a:latin typeface="Arial"/>
               </a:rPr>
               <a:t>Venha descobrir a esperança no amor do Pai</a:t>
-            </a:r>
-          </a:p>
-        </p:txBody>
-      </p:sp>
-      <p:sp>
-        <p:nvSpPr>
-          <p:cNvPr id="5" name="TextBox 4"/>
-          <p:cNvSpPr txBox="1"/>
-          <p:nvPr/>
-        </p:nvSpPr>
-        <p:spPr>
-          <a:xfrm>
-            <a:off x="594360" y="4251960"/>
-            <a:ext cx="11002975" cy="347472"/>
-          </a:xfrm>
-          <a:prstGeom prst="rect">
-            <a:avLst/>
-          </a:prstGeom>
-          <a:noFill/>
-        </p:spPr>
-        <p:txBody>
-          <a:bodyPr wrap="square">
-            <a:spAutoFit/>
-          </a:bodyPr>
-          <a:lstStyle/>
-          <a:p>
-            <a:pPr algn="ctr"/>
-            <a:r>
-              <a:rPr sz="2200" b="0" i="1">
-                <a:solidFill>
-                  <a:srgbClr val="8C8C8C"/>
-                </a:solidFill>
-                <a:latin typeface="Arial"/>
-              </a:rPr>
-              <a:t/>
             </a:r>
           </a:p>
         </p:txBody>
@@ -5952,8 +5217,8 @@
         </p:nvSpPr>
         <p:spPr>
           <a:xfrm>
-            <a:off x="594360" y="2258568"/>
-            <a:ext cx="11002975" cy="685800"/>
+            <a:off x="640080" y="2052828"/>
+            <a:ext cx="10911535" cy="731520"/>
           </a:xfrm>
           <a:prstGeom prst="rect">
             <a:avLst/>
@@ -5968,7 +5233,7 @@
           <a:p>
             <a:pPr algn="ctr"/>
             <a:r>
-              <a:rPr sz="4141" b="1" i="0">
+              <a:rPr sz="4500" b="1" i="0">
                 <a:solidFill>
                   <a:srgbClr val="FFFFFF"/>
                 </a:solidFill>
@@ -5987,8 +5252,8 @@
         </p:nvSpPr>
         <p:spPr>
           <a:xfrm>
-            <a:off x="594360" y="2980944"/>
-            <a:ext cx="11002975" cy="347472"/>
+            <a:off x="640080" y="2985516"/>
+            <a:ext cx="10911535" cy="731520"/>
           </a:xfrm>
           <a:prstGeom prst="rect">
             <a:avLst/>
@@ -6003,83 +5268,13 @@
           <a:p>
             <a:pPr algn="ctr"/>
             <a:r>
-              <a:rPr sz="2200" b="0" i="1">
-                <a:solidFill>
-                  <a:srgbClr val="8C8C8C"/>
-                </a:solidFill>
-                <a:latin typeface="Arial"/>
-              </a:rPr>
-              <a:t/>
-            </a:r>
-          </a:p>
-        </p:txBody>
-      </p:sp>
-      <p:sp>
-        <p:nvSpPr>
-          <p:cNvPr id="4" name="TextBox 3"/>
-          <p:cNvSpPr txBox="1"/>
-          <p:nvPr/>
-        </p:nvSpPr>
-        <p:spPr>
-          <a:xfrm>
-            <a:off x="594360" y="3529584"/>
-            <a:ext cx="11002975" cy="685800"/>
-          </a:xfrm>
-          <a:prstGeom prst="rect">
-            <a:avLst/>
-          </a:prstGeom>
-          <a:noFill/>
-        </p:spPr>
-        <p:txBody>
-          <a:bodyPr wrap="square">
-            <a:spAutoFit/>
-          </a:bodyPr>
-          <a:lstStyle/>
-          <a:p>
-            <a:pPr algn="ctr"/>
-            <a:r>
-              <a:rPr sz="4400" b="1" i="0">
+              <a:rPr sz="4800" b="1" i="0">
                 <a:solidFill>
                   <a:srgbClr val="FFFFFF"/>
                 </a:solidFill>
                 <a:latin typeface="Arial"/>
               </a:rPr>
               <a:t>Levante os olhos</a:t>
-            </a:r>
-          </a:p>
-        </p:txBody>
-      </p:sp>
-      <p:sp>
-        <p:nvSpPr>
-          <p:cNvPr id="5" name="TextBox 4"/>
-          <p:cNvSpPr txBox="1"/>
-          <p:nvPr/>
-        </p:nvSpPr>
-        <p:spPr>
-          <a:xfrm>
-            <a:off x="594360" y="4251960"/>
-            <a:ext cx="11002975" cy="347472"/>
-          </a:xfrm>
-          <a:prstGeom prst="rect">
-            <a:avLst/>
-          </a:prstGeom>
-          <a:noFill/>
-        </p:spPr>
-        <p:txBody>
-          <a:bodyPr wrap="square">
-            <a:spAutoFit/>
-          </a:bodyPr>
-          <a:lstStyle/>
-          <a:p>
-            <a:pPr algn="ctr"/>
-            <a:r>
-              <a:rPr sz="2200" b="0" i="1">
-                <a:solidFill>
-                  <a:srgbClr val="8C8C8C"/>
-                </a:solidFill>
-                <a:latin typeface="Arial"/>
-              </a:rPr>
-              <a:t/>
             </a:r>
           </a:p>
         </p:txBody>
@@ -6118,8 +5313,8 @@
         </p:nvSpPr>
         <p:spPr>
           <a:xfrm>
-            <a:off x="594360" y="2258568"/>
-            <a:ext cx="11002975" cy="685800"/>
+            <a:off x="640080" y="2052828"/>
+            <a:ext cx="10911535" cy="731520"/>
           </a:xfrm>
           <a:prstGeom prst="rect">
             <a:avLst/>
@@ -6134,7 +5329,7 @@
           <a:p>
             <a:pPr algn="ctr"/>
             <a:r>
-              <a:rPr sz="4400" b="1" i="0">
+              <a:rPr sz="4800" b="1" i="0">
                 <a:solidFill>
                   <a:srgbClr val="FFFFFF"/>
                 </a:solidFill>
@@ -6153,8 +5348,8 @@
         </p:nvSpPr>
         <p:spPr>
           <a:xfrm>
-            <a:off x="594360" y="2980944"/>
-            <a:ext cx="11002975" cy="347472"/>
+            <a:off x="640080" y="2985516"/>
+            <a:ext cx="10911535" cy="731520"/>
           </a:xfrm>
           <a:prstGeom prst="rect">
             <a:avLst/>
@@ -6169,83 +5364,13 @@
           <a:p>
             <a:pPr algn="ctr"/>
             <a:r>
-              <a:rPr sz="2200" b="0" i="1">
-                <a:solidFill>
-                  <a:srgbClr val="8C8C8C"/>
-                </a:solidFill>
-                <a:latin typeface="Arial"/>
-              </a:rPr>
-              <a:t/>
-            </a:r>
-          </a:p>
-        </p:txBody>
-      </p:sp>
-      <p:sp>
-        <p:nvSpPr>
-          <p:cNvPr id="4" name="TextBox 3"/>
-          <p:cNvSpPr txBox="1"/>
-          <p:nvPr/>
-        </p:nvSpPr>
-        <p:spPr>
-          <a:xfrm>
-            <a:off x="594360" y="3529584"/>
-            <a:ext cx="11002975" cy="685800"/>
-          </a:xfrm>
-          <a:prstGeom prst="rect">
-            <a:avLst/>
-          </a:prstGeom>
-          <a:noFill/>
-        </p:spPr>
-        <p:txBody>
-          <a:bodyPr wrap="square">
-            <a:spAutoFit/>
-          </a:bodyPr>
-          <a:lstStyle/>
-          <a:p>
-            <a:pPr algn="ctr"/>
-            <a:r>
-              <a:rPr sz="4141" b="1" i="0">
+              <a:rPr sz="4500" b="1" i="0">
                 <a:solidFill>
                   <a:srgbClr val="FFFFFF"/>
                 </a:solidFill>
                 <a:latin typeface="Arial"/>
               </a:rPr>
               <a:t>Jesus Salvador, para todo o sempre</a:t>
-            </a:r>
-          </a:p>
-        </p:txBody>
-      </p:sp>
-      <p:sp>
-        <p:nvSpPr>
-          <p:cNvPr id="5" name="TextBox 4"/>
-          <p:cNvSpPr txBox="1"/>
-          <p:nvPr/>
-        </p:nvSpPr>
-        <p:spPr>
-          <a:xfrm>
-            <a:off x="594360" y="4251960"/>
-            <a:ext cx="11002975" cy="347472"/>
-          </a:xfrm>
-          <a:prstGeom prst="rect">
-            <a:avLst/>
-          </a:prstGeom>
-          <a:noFill/>
-        </p:spPr>
-        <p:txBody>
-          <a:bodyPr wrap="square">
-            <a:spAutoFit/>
-          </a:bodyPr>
-          <a:lstStyle/>
-          <a:p>
-            <a:pPr algn="ctr"/>
-            <a:r>
-              <a:rPr sz="2200" b="0" i="1">
-                <a:solidFill>
-                  <a:srgbClr val="8C8C8C"/>
-                </a:solidFill>
-                <a:latin typeface="Arial"/>
-              </a:rPr>
-              <a:t/>
             </a:r>
           </a:p>
         </p:txBody>

--- a/output_pptx/Our_God_Is_Love.pptx
+++ b/output_pptx/Our_God_Is_Love.pptx
@@ -3419,6 +3419,76 @@
           </a:p>
         </p:txBody>
       </p:sp>
+      <p:sp>
+        <p:nvSpPr>
+          <p:cNvPr id="4" name="TextBox 3"/>
+          <p:cNvSpPr txBox="1"/>
+          <p:nvPr/>
+        </p:nvSpPr>
+        <p:spPr>
+          <a:xfrm>
+            <a:off x="640080" y="4128516"/>
+            <a:ext cx="10911535" cy="310896"/>
+          </a:xfrm>
+          <a:prstGeom prst="rect">
+            <a:avLst/>
+          </a:prstGeom>
+          <a:noFill/>
+        </p:spPr>
+        <p:txBody>
+          <a:bodyPr wrap="square">
+            <a:spAutoFit/>
+          </a:bodyPr>
+          <a:lstStyle/>
+          <a:p>
+            <a:pPr algn="ctr"/>
+            <a:r>
+              <a:rPr sz="2000" b="0" i="0">
+                <a:solidFill>
+                  <a:srgbClr val="828282"/>
+                </a:solidFill>
+                <a:latin typeface="Arial"/>
+              </a:rPr>
+              <a:t>これが愛です</a:t>
+            </a:r>
+          </a:p>
+        </p:txBody>
+      </p:sp>
+      <p:sp>
+        <p:nvSpPr>
+          <p:cNvPr id="5" name="TextBox 4"/>
+          <p:cNvSpPr txBox="1"/>
+          <p:nvPr/>
+        </p:nvSpPr>
+        <p:spPr>
+          <a:xfrm>
+            <a:off x="640080" y="4494276"/>
+            <a:ext cx="10911535" cy="310896"/>
+          </a:xfrm>
+          <a:prstGeom prst="rect">
+            <a:avLst/>
+          </a:prstGeom>
+          <a:noFill/>
+        </p:spPr>
+        <p:txBody>
+          <a:bodyPr wrap="square">
+            <a:spAutoFit/>
+          </a:bodyPr>
+          <a:lstStyle/>
+          <a:p>
+            <a:pPr algn="ctr"/>
+            <a:r>
+              <a:rPr sz="2000" b="0" i="0">
+                <a:solidFill>
+                  <a:srgbClr val="828282"/>
+                </a:solidFill>
+                <a:latin typeface="Arial"/>
+              </a:rPr>
+              <a:t>イエスは来て死なれました</a:t>
+            </a:r>
+          </a:p>
+        </p:txBody>
+      </p:sp>
     </p:spTree>
   </p:cSld>
   <p:clrMapOvr>
@@ -3515,6 +3585,76 @@
           </a:p>
         </p:txBody>
       </p:sp>
+      <p:sp>
+        <p:nvSpPr>
+          <p:cNvPr id="4" name="TextBox 3"/>
+          <p:cNvSpPr txBox="1"/>
+          <p:nvPr/>
+        </p:nvSpPr>
+        <p:spPr>
+          <a:xfrm>
+            <a:off x="640080" y="4128516"/>
+            <a:ext cx="10911535" cy="310896"/>
+          </a:xfrm>
+          <a:prstGeom prst="rect">
+            <a:avLst/>
+          </a:prstGeom>
+          <a:noFill/>
+        </p:spPr>
+        <p:txBody>
+          <a:bodyPr wrap="square">
+            <a:spAutoFit/>
+          </a:bodyPr>
+          <a:lstStyle/>
+          <a:p>
+            <a:pPr algn="ctr"/>
+            <a:r>
+              <a:rPr sz="2000" b="0" i="0">
+                <a:solidFill>
+                  <a:srgbClr val="828282"/>
+                </a:solidFill>
+                <a:latin typeface="Arial"/>
+              </a:rPr>
+              <a:t>そして私たちのために命をささげられました</a:t>
+            </a:r>
+          </a:p>
+        </p:txBody>
+      </p:sp>
+      <p:sp>
+        <p:nvSpPr>
+          <p:cNvPr id="5" name="TextBox 4"/>
+          <p:cNvSpPr txBox="1"/>
+          <p:nvPr/>
+        </p:nvSpPr>
+        <p:spPr>
+          <a:xfrm>
+            <a:off x="640080" y="4494276"/>
+            <a:ext cx="10911535" cy="310896"/>
+          </a:xfrm>
+          <a:prstGeom prst="rect">
+            <a:avLst/>
+          </a:prstGeom>
+          <a:noFill/>
+        </p:spPr>
+        <p:txBody>
+          <a:bodyPr wrap="square">
+            <a:spAutoFit/>
+          </a:bodyPr>
+          <a:lstStyle/>
+          <a:p>
+            <a:pPr algn="ctr"/>
+            <a:r>
+              <a:rPr sz="2000" b="0" i="0">
+                <a:solidFill>
+                  <a:srgbClr val="828282"/>
+                </a:solidFill>
+                <a:latin typeface="Arial"/>
+              </a:rPr>
+              <a:t>声を上げましょう</a:t>
+            </a:r>
+          </a:p>
+        </p:txBody>
+      </p:sp>
     </p:spTree>
   </p:cSld>
   <p:clrMapOvr>
@@ -3611,6 +3751,76 @@
           </a:p>
         </p:txBody>
       </p:sp>
+      <p:sp>
+        <p:nvSpPr>
+          <p:cNvPr id="4" name="TextBox 3"/>
+          <p:cNvSpPr txBox="1"/>
+          <p:nvPr/>
+        </p:nvSpPr>
+        <p:spPr>
+          <a:xfrm>
+            <a:off x="640080" y="4128516"/>
+            <a:ext cx="10911535" cy="310896"/>
+          </a:xfrm>
+          <a:prstGeom prst="rect">
+            <a:avLst/>
+          </a:prstGeom>
+          <a:noFill/>
+        </p:spPr>
+        <p:txBody>
+          <a:bodyPr wrap="square">
+            <a:spAutoFit/>
+          </a:bodyPr>
+          <a:lstStyle/>
+          <a:p>
+            <a:pPr algn="ctr"/>
+            <a:r>
+              <a:rPr sz="2000" b="0" i="0">
+                <a:solidFill>
+                  <a:srgbClr val="828282"/>
+                </a:solidFill>
+                <a:latin typeface="Arial"/>
+              </a:rPr>
+              <a:t>彼がなさったすべてのために歌いましょう</a:t>
+            </a:r>
+          </a:p>
+        </p:txBody>
+      </p:sp>
+      <p:sp>
+        <p:nvSpPr>
+          <p:cNvPr id="5" name="TextBox 4"/>
+          <p:cNvSpPr txBox="1"/>
+          <p:nvPr/>
+        </p:nvSpPr>
+        <p:spPr>
+          <a:xfrm>
+            <a:off x="640080" y="4494276"/>
+            <a:ext cx="10911535" cy="310896"/>
+          </a:xfrm>
+          <a:prstGeom prst="rect">
+            <a:avLst/>
+          </a:prstGeom>
+          <a:noFill/>
+        </p:spPr>
+        <p:txBody>
+          <a:bodyPr wrap="square">
+            <a:spAutoFit/>
+          </a:bodyPr>
+          <a:lstStyle/>
+          <a:p>
+            <a:pPr algn="ctr"/>
+            <a:r>
+              <a:rPr sz="2000" b="0" i="0">
+                <a:solidFill>
+                  <a:srgbClr val="828282"/>
+                </a:solidFill>
+                <a:latin typeface="Arial"/>
+              </a:rPr>
+              <a:t>私たちの罪は克服されました</a:t>
+            </a:r>
+          </a:p>
+        </p:txBody>
+      </p:sp>
     </p:spTree>
   </p:cSld>
   <p:clrMapOvr>
@@ -3707,6 +3917,76 @@
           </a:p>
         </p:txBody>
       </p:sp>
+      <p:sp>
+        <p:nvSpPr>
+          <p:cNvPr id="4" name="TextBox 3"/>
+          <p:cNvSpPr txBox="1"/>
+          <p:nvPr/>
+        </p:nvSpPr>
+        <p:spPr>
+          <a:xfrm>
+            <a:off x="640080" y="4128516"/>
+            <a:ext cx="10911535" cy="310896"/>
+          </a:xfrm>
+          <a:prstGeom prst="rect">
+            <a:avLst/>
+          </a:prstGeom>
+          <a:noFill/>
+        </p:spPr>
+        <p:txBody>
+          <a:bodyPr wrap="square">
+            <a:spAutoFit/>
+          </a:bodyPr>
+          <a:lstStyle/>
+          <a:p>
+            <a:pPr algn="ctr"/>
+            <a:r>
+              <a:rPr sz="2000" b="0" i="0">
+                <a:solidFill>
+                  <a:srgbClr val="828282"/>
+                </a:solidFill>
+                <a:latin typeface="Arial"/>
+              </a:rPr>
+              <a:t>私たちの神は愛</a:t>
+            </a:r>
+          </a:p>
+        </p:txBody>
+      </p:sp>
+      <p:sp>
+        <p:nvSpPr>
+          <p:cNvPr id="5" name="TextBox 4"/>
+          <p:cNvSpPr txBox="1"/>
+          <p:nvPr/>
+        </p:nvSpPr>
+        <p:spPr>
+          <a:xfrm>
+            <a:off x="640080" y="4494276"/>
+            <a:ext cx="10911535" cy="310896"/>
+          </a:xfrm>
+          <a:prstGeom prst="rect">
+            <a:avLst/>
+          </a:prstGeom>
+          <a:noFill/>
+        </p:spPr>
+        <p:txBody>
+          <a:bodyPr wrap="square">
+            <a:spAutoFit/>
+          </a:bodyPr>
+          <a:lstStyle/>
+          <a:p>
+            <a:pPr algn="ctr"/>
+            <a:r>
+              <a:rPr sz="2000" b="0" i="0">
+                <a:solidFill>
+                  <a:srgbClr val="828282"/>
+                </a:solidFill>
+                <a:latin typeface="Arial"/>
+              </a:rPr>
+              <a:t>すべての遠く離れた壊れた心</a:t>
+            </a:r>
+          </a:p>
+        </p:txBody>
+      </p:sp>
     </p:spTree>
   </p:cSld>
   <p:clrMapOvr>
@@ -3768,6 +4048,41 @@
           </a:p>
         </p:txBody>
       </p:sp>
+      <p:sp>
+        <p:nvSpPr>
+          <p:cNvPr id="3" name="TextBox 2"/>
+          <p:cNvSpPr txBox="1"/>
+          <p:nvPr/>
+        </p:nvSpPr>
+        <p:spPr>
+          <a:xfrm>
+            <a:off x="640080" y="3845052"/>
+            <a:ext cx="10911535" cy="310896"/>
+          </a:xfrm>
+          <a:prstGeom prst="rect">
+            <a:avLst/>
+          </a:prstGeom>
+          <a:noFill/>
+        </p:spPr>
+        <p:txBody>
+          <a:bodyPr wrap="square">
+            <a:spAutoFit/>
+          </a:bodyPr>
+          <a:lstStyle/>
+          <a:p>
+            <a:pPr algn="ctr"/>
+            <a:r>
+              <a:rPr sz="2000" b="0" i="0">
+                <a:solidFill>
+                  <a:srgbClr val="828282"/>
+                </a:solidFill>
+                <a:latin typeface="Arial"/>
+              </a:rPr>
+              <a:t>すべての祈り、すべての伸ばされた腕</a:t>
+            </a:r>
+          </a:p>
+        </p:txBody>
+      </p:sp>
     </p:spTree>
   </p:cSld>
   <p:clrMapOvr>
@@ -3864,6 +4179,76 @@
           </a:p>
         </p:txBody>
       </p:sp>
+      <p:sp>
+        <p:nvSpPr>
+          <p:cNvPr id="4" name="TextBox 3"/>
+          <p:cNvSpPr txBox="1"/>
+          <p:nvPr/>
+        </p:nvSpPr>
+        <p:spPr>
+          <a:xfrm>
+            <a:off x="640080" y="4128516"/>
+            <a:ext cx="10911535" cy="310896"/>
+          </a:xfrm>
+          <a:prstGeom prst="rect">
+            <a:avLst/>
+          </a:prstGeom>
+          <a:noFill/>
+        </p:spPr>
+        <p:txBody>
+          <a:bodyPr wrap="square">
+            <a:spAutoFit/>
+          </a:bodyPr>
+          <a:lstStyle/>
+          <a:p>
+            <a:pPr algn="ctr"/>
+            <a:r>
+              <a:rPr sz="2000" b="0" i="0">
+                <a:solidFill>
+                  <a:srgbClr val="828282"/>
+                </a:solidFill>
+                <a:latin typeface="Arial"/>
+              </a:rPr>
+              <a:t>父の愛の中に希望を見出しながら</a:t>
+            </a:r>
+          </a:p>
+        </p:txBody>
+      </p:sp>
+      <p:sp>
+        <p:nvSpPr>
+          <p:cNvPr id="5" name="TextBox 4"/>
+          <p:cNvSpPr txBox="1"/>
+          <p:nvPr/>
+        </p:nvSpPr>
+        <p:spPr>
+          <a:xfrm>
+            <a:off x="640080" y="4494276"/>
+            <a:ext cx="10911535" cy="310896"/>
+          </a:xfrm>
+          <a:prstGeom prst="rect">
+            <a:avLst/>
+          </a:prstGeom>
+          <a:noFill/>
+        </p:spPr>
+        <p:txBody>
+          <a:bodyPr wrap="square">
+            <a:spAutoFit/>
+          </a:bodyPr>
+          <a:lstStyle/>
+          <a:p>
+            <a:pPr algn="ctr"/>
+            <a:r>
+              <a:rPr sz="2000" b="0" i="0">
+                <a:solidFill>
+                  <a:srgbClr val="828282"/>
+                </a:solidFill>
+                <a:latin typeface="Arial"/>
+              </a:rPr>
+              <a:t>時代から時代へ、彼の賛美は上がります</a:t>
+            </a:r>
+          </a:p>
+        </p:txBody>
+      </p:sp>
     </p:spTree>
   </p:cSld>
   <p:clrMapOvr>
@@ -3960,6 +4345,76 @@
           </a:p>
         </p:txBody>
       </p:sp>
+      <p:sp>
+        <p:nvSpPr>
+          <p:cNvPr id="4" name="TextBox 3"/>
+          <p:cNvSpPr txBox="1"/>
+          <p:nvPr/>
+        </p:nvSpPr>
+        <p:spPr>
+          <a:xfrm>
+            <a:off x="640080" y="4128516"/>
+            <a:ext cx="10911535" cy="310896"/>
+          </a:xfrm>
+          <a:prstGeom prst="rect">
+            <a:avLst/>
+          </a:prstGeom>
+          <a:noFill/>
+        </p:spPr>
+        <p:txBody>
+          <a:bodyPr wrap="square">
+            <a:spAutoFit/>
+          </a:bodyPr>
+          <a:lstStyle/>
+          <a:p>
+            <a:pPr algn="ctr"/>
+            <a:r>
+              <a:rPr sz="2000" b="0" i="0">
+                <a:solidFill>
+                  <a:srgbClr val="828282"/>
+                </a:solidFill>
+                <a:latin typeface="Arial"/>
+              </a:rPr>
+              <a:t>すべての栄光とこしえまでも</a:t>
+            </a:r>
+          </a:p>
+        </p:txBody>
+      </p:sp>
+      <p:sp>
+        <p:nvSpPr>
+          <p:cNvPr id="5" name="TextBox 4"/>
+          <p:cNvSpPr txBox="1"/>
+          <p:nvPr/>
+        </p:nvSpPr>
+        <p:spPr>
+          <a:xfrm>
+            <a:off x="640080" y="4494276"/>
+            <a:ext cx="10911535" cy="310896"/>
+          </a:xfrm>
+          <a:prstGeom prst="rect">
+            <a:avLst/>
+          </a:prstGeom>
+          <a:noFill/>
+        </p:spPr>
+        <p:txBody>
+          <a:bodyPr wrap="square">
+            <a:spAutoFit/>
+          </a:bodyPr>
+          <a:lstStyle/>
+          <a:p>
+            <a:pPr algn="ctr"/>
+            <a:r>
+              <a:rPr sz="2000" b="0" i="0">
+                <a:solidFill>
+                  <a:srgbClr val="828282"/>
+                </a:solidFill>
+                <a:latin typeface="Arial"/>
+              </a:rPr>
+              <a:t>救い主イエスよ、永遠にそしてその先へ</a:t>
+            </a:r>
+          </a:p>
+        </p:txBody>
+      </p:sp>
     </p:spTree>
   </p:cSld>
   <p:clrMapOvr>
@@ -4056,6 +4511,76 @@
           </a:p>
         </p:txBody>
       </p:sp>
+      <p:sp>
+        <p:nvSpPr>
+          <p:cNvPr id="4" name="TextBox 3"/>
+          <p:cNvSpPr txBox="1"/>
+          <p:nvPr/>
+        </p:nvSpPr>
+        <p:spPr>
+          <a:xfrm>
+            <a:off x="640080" y="4128516"/>
+            <a:ext cx="10911535" cy="310896"/>
+          </a:xfrm>
+          <a:prstGeom prst="rect">
+            <a:avLst/>
+          </a:prstGeom>
+          <a:noFill/>
+        </p:spPr>
+        <p:txBody>
+          <a:bodyPr wrap="square">
+            <a:spAutoFit/>
+          </a:bodyPr>
+          <a:lstStyle/>
+          <a:p>
+            <a:pPr algn="ctr"/>
+            <a:r>
+              <a:rPr sz="2000" b="0" i="0">
+                <a:solidFill>
+                  <a:srgbClr val="828282"/>
+                </a:solidFill>
+                <a:latin typeface="Arial"/>
+              </a:rPr>
+              <a:t>時代から時代へ私たちは歌います</a:t>
+            </a:r>
+          </a:p>
+        </p:txBody>
+      </p:sp>
+      <p:sp>
+        <p:nvSpPr>
+          <p:cNvPr id="5" name="TextBox 4"/>
+          <p:cNvSpPr txBox="1"/>
+          <p:nvPr/>
+        </p:nvSpPr>
+        <p:spPr>
+          <a:xfrm>
+            <a:off x="640080" y="4494276"/>
+            <a:ext cx="10911535" cy="310896"/>
+          </a:xfrm>
+          <a:prstGeom prst="rect">
+            <a:avLst/>
+          </a:prstGeom>
+          <a:noFill/>
+        </p:spPr>
+        <p:txBody>
+          <a:bodyPr wrap="square">
+            <a:spAutoFit/>
+          </a:bodyPr>
+          <a:lstStyle/>
+          <a:p>
+            <a:pPr algn="ctr"/>
+            <a:r>
+              <a:rPr sz="2000" b="0" i="0">
+                <a:solidFill>
+                  <a:srgbClr val="828282"/>
+                </a:solidFill>
+                <a:latin typeface="Arial"/>
+              </a:rPr>
+              <a:t>彼がなさったすべてのことの光の中で</a:t>
+            </a:r>
+          </a:p>
+        </p:txBody>
+      </p:sp>
     </p:spTree>
   </p:cSld>
   <p:clrMapOvr>
@@ -4152,6 +4677,76 @@
           </a:p>
         </p:txBody>
       </p:sp>
+      <p:sp>
+        <p:nvSpPr>
+          <p:cNvPr id="4" name="TextBox 3"/>
+          <p:cNvSpPr txBox="1"/>
+          <p:nvPr/>
+        </p:nvSpPr>
+        <p:spPr>
+          <a:xfrm>
+            <a:off x="640080" y="4128516"/>
+            <a:ext cx="10911535" cy="310896"/>
+          </a:xfrm>
+          <a:prstGeom prst="rect">
+            <a:avLst/>
+          </a:prstGeom>
+          <a:noFill/>
+        </p:spPr>
+        <p:txBody>
+          <a:bodyPr wrap="square">
+            <a:spAutoFit/>
+          </a:bodyPr>
+          <a:lstStyle/>
+          <a:p>
+            <a:pPr algn="ctr"/>
+            <a:r>
+              <a:rPr sz="2000" b="0" i="0">
+                <a:solidFill>
+                  <a:srgbClr val="828282"/>
+                </a:solidFill>
+                <a:latin typeface="Arial"/>
+              </a:rPr>
+              <a:t>すべての地、全世界が歌う</a:t>
+            </a:r>
+          </a:p>
+        </p:txBody>
+      </p:sp>
+      <p:sp>
+        <p:nvSpPr>
+          <p:cNvPr id="5" name="TextBox 4"/>
+          <p:cNvSpPr txBox="1"/>
+          <p:nvPr/>
+        </p:nvSpPr>
+        <p:spPr>
+          <a:xfrm>
+            <a:off x="640080" y="4494276"/>
+            <a:ext cx="10911535" cy="310896"/>
+          </a:xfrm>
+          <a:prstGeom prst="rect">
+            <a:avLst/>
+          </a:prstGeom>
+          <a:noFill/>
+        </p:spPr>
+        <p:txBody>
+          <a:bodyPr wrap="square">
+            <a:spAutoFit/>
+          </a:bodyPr>
+          <a:lstStyle/>
+          <a:p>
+            <a:pPr algn="ctr"/>
+            <a:r>
+              <a:rPr sz="2000" b="0" i="0">
+                <a:solidFill>
+                  <a:srgbClr val="828282"/>
+                </a:solidFill>
+                <a:latin typeface="Arial"/>
+              </a:rPr>
+              <a:t>彼の愛の驚異の中で</a:t>
+            </a:r>
+          </a:p>
+        </p:txBody>
+      </p:sp>
     </p:spTree>
   </p:cSld>
   <p:clrMapOvr>
@@ -5087,6 +5682,76 @@
           </a:p>
         </p:txBody>
       </p:sp>
+      <p:sp>
+        <p:nvSpPr>
+          <p:cNvPr id="4" name="TextBox 3"/>
+          <p:cNvSpPr txBox="1"/>
+          <p:nvPr/>
+        </p:nvSpPr>
+        <p:spPr>
+          <a:xfrm>
+            <a:off x="640080" y="4128516"/>
+            <a:ext cx="10911535" cy="310896"/>
+          </a:xfrm>
+          <a:prstGeom prst="rect">
+            <a:avLst/>
+          </a:prstGeom>
+          <a:noFill/>
+        </p:spPr>
+        <p:txBody>
+          <a:bodyPr wrap="square">
+            <a:spAutoFit/>
+          </a:bodyPr>
+          <a:lstStyle/>
+          <a:p>
+            <a:pPr algn="ctr"/>
+            <a:r>
+              <a:rPr sz="2000" b="0" i="0">
+                <a:solidFill>
+                  <a:srgbClr val="828282"/>
+                </a:solidFill>
+                <a:latin typeface="Arial"/>
+              </a:rPr>
+              <a:t>私たちの神は愛</a:t>
+            </a:r>
+          </a:p>
+        </p:txBody>
+      </p:sp>
+      <p:sp>
+        <p:nvSpPr>
+          <p:cNvPr id="5" name="TextBox 4"/>
+          <p:cNvSpPr txBox="1"/>
+          <p:nvPr/>
+        </p:nvSpPr>
+        <p:spPr>
+          <a:xfrm>
+            <a:off x="640080" y="4494276"/>
+            <a:ext cx="10911535" cy="310896"/>
+          </a:xfrm>
+          <a:prstGeom prst="rect">
+            <a:avLst/>
+          </a:prstGeom>
+          <a:noFill/>
+        </p:spPr>
+        <p:txBody>
+          <a:bodyPr wrap="square">
+            <a:spAutoFit/>
+          </a:bodyPr>
+          <a:lstStyle/>
+          <a:p>
+            <a:pPr algn="ctr"/>
+            <a:r>
+              <a:rPr sz="2000" b="0" i="0">
+                <a:solidFill>
+                  <a:srgbClr val="828282"/>
+                </a:solidFill>
+                <a:latin typeface="Arial"/>
+              </a:rPr>
+              <a:t>すべての魂とすべての鼓動する心</a:t>
+            </a:r>
+          </a:p>
+        </p:txBody>
+      </p:sp>
     </p:spTree>
   </p:cSld>
   <p:clrMapOvr>
@@ -5183,6 +5848,76 @@
           </a:p>
         </p:txBody>
       </p:sp>
+      <p:sp>
+        <p:nvSpPr>
+          <p:cNvPr id="4" name="TextBox 3"/>
+          <p:cNvSpPr txBox="1"/>
+          <p:nvPr/>
+        </p:nvSpPr>
+        <p:spPr>
+          <a:xfrm>
+            <a:off x="640080" y="4128516"/>
+            <a:ext cx="10911535" cy="310896"/>
+          </a:xfrm>
+          <a:prstGeom prst="rect">
+            <a:avLst/>
+          </a:prstGeom>
+          <a:noFill/>
+        </p:spPr>
+        <p:txBody>
+          <a:bodyPr wrap="square">
+            <a:spAutoFit/>
+          </a:bodyPr>
+          <a:lstStyle/>
+          <a:p>
+            <a:pPr algn="ctr"/>
+            <a:r>
+              <a:rPr sz="2000" b="0" i="0">
+                <a:solidFill>
+                  <a:srgbClr val="828282"/>
+                </a:solidFill>
+                <a:latin typeface="Arial"/>
+              </a:rPr>
+              <a:t>すべての国民とすべての言葉</a:t>
+            </a:r>
+          </a:p>
+        </p:txBody>
+      </p:sp>
+      <p:sp>
+        <p:nvSpPr>
+          <p:cNvPr id="5" name="TextBox 4"/>
+          <p:cNvSpPr txBox="1"/>
+          <p:nvPr/>
+        </p:nvSpPr>
+        <p:spPr>
+          <a:xfrm>
+            <a:off x="640080" y="4494276"/>
+            <a:ext cx="10911535" cy="310896"/>
+          </a:xfrm>
+          <a:prstGeom prst="rect">
+            <a:avLst/>
+          </a:prstGeom>
+          <a:noFill/>
+        </p:spPr>
+        <p:txBody>
+          <a:bodyPr wrap="square">
+            <a:spAutoFit/>
+          </a:bodyPr>
+          <a:lstStyle/>
+          <a:p>
+            <a:pPr algn="ctr"/>
+            <a:r>
+              <a:rPr sz="2000" b="0" i="0">
+                <a:solidFill>
+                  <a:srgbClr val="828282"/>
+                </a:solidFill>
+                <a:latin typeface="Arial"/>
+              </a:rPr>
+              <a:t>父の愛の中に希望を見出しに来てください</a:t>
+            </a:r>
+          </a:p>
+        </p:txBody>
+      </p:sp>
     </p:spTree>
   </p:cSld>
   <p:clrMapOvr>
@@ -5279,6 +6014,76 @@
           </a:p>
         </p:txBody>
       </p:sp>
+      <p:sp>
+        <p:nvSpPr>
+          <p:cNvPr id="4" name="TextBox 3"/>
+          <p:cNvSpPr txBox="1"/>
+          <p:nvPr/>
+        </p:nvSpPr>
+        <p:spPr>
+          <a:xfrm>
+            <a:off x="640080" y="4128516"/>
+            <a:ext cx="10911535" cy="310896"/>
+          </a:xfrm>
+          <a:prstGeom prst="rect">
+            <a:avLst/>
+          </a:prstGeom>
+          <a:noFill/>
+        </p:spPr>
+        <p:txBody>
+          <a:bodyPr wrap="square">
+            <a:spAutoFit/>
+          </a:bodyPr>
+          <a:lstStyle/>
+          <a:p>
+            <a:pPr algn="ctr"/>
+            <a:r>
+              <a:rPr sz="2000" b="0" i="0">
+                <a:solidFill>
+                  <a:srgbClr val="828282"/>
+                </a:solidFill>
+                <a:latin typeface="Arial"/>
+              </a:rPr>
+              <a:t>すべての創造物は一つのように身をかがめます</a:t>
+            </a:r>
+          </a:p>
+        </p:txBody>
+      </p:sp>
+      <p:sp>
+        <p:nvSpPr>
+          <p:cNvPr id="5" name="TextBox 4"/>
+          <p:cNvSpPr txBox="1"/>
+          <p:nvPr/>
+        </p:nvSpPr>
+        <p:spPr>
+          <a:xfrm>
+            <a:off x="640080" y="4494276"/>
+            <a:ext cx="10911535" cy="310896"/>
+          </a:xfrm>
+          <a:prstGeom prst="rect">
+            <a:avLst/>
+          </a:prstGeom>
+          <a:noFill/>
+        </p:spPr>
+        <p:txBody>
+          <a:bodyPr wrap="square">
+            <a:spAutoFit/>
+          </a:bodyPr>
+          <a:lstStyle/>
+          <a:p>
+            <a:pPr algn="ctr"/>
+            <a:r>
+              <a:rPr sz="2000" b="0" i="0">
+                <a:solidFill>
+                  <a:srgbClr val="828282"/>
+                </a:solidFill>
+                <a:latin typeface="Arial"/>
+              </a:rPr>
+              <a:t>目を上げてください</a:t>
+            </a:r>
+          </a:p>
+        </p:txBody>
+      </p:sp>
     </p:spTree>
   </p:cSld>
   <p:clrMapOvr>
@@ -5371,6 +6176,76 @@
                 <a:latin typeface="Arial"/>
               </a:rPr>
               <a:t>Jesus Salvador, para todo o sempre</a:t>
+            </a:r>
+          </a:p>
+        </p:txBody>
+      </p:sp>
+      <p:sp>
+        <p:nvSpPr>
+          <p:cNvPr id="4" name="TextBox 3"/>
+          <p:cNvSpPr txBox="1"/>
+          <p:nvPr/>
+        </p:nvSpPr>
+        <p:spPr>
+          <a:xfrm>
+            <a:off x="640080" y="4128516"/>
+            <a:ext cx="10911535" cy="310896"/>
+          </a:xfrm>
+          <a:prstGeom prst="rect">
+            <a:avLst/>
+          </a:prstGeom>
+          <a:noFill/>
+        </p:spPr>
+        <p:txBody>
+          <a:bodyPr wrap="square">
+            <a:spAutoFit/>
+          </a:bodyPr>
+          <a:lstStyle/>
+          <a:p>
+            <a:pPr algn="ctr"/>
+            <a:r>
+              <a:rPr sz="2000" b="0" i="0">
+                <a:solidFill>
+                  <a:srgbClr val="828282"/>
+                </a:solidFill>
+                <a:latin typeface="Arial"/>
+              </a:rPr>
+              <a:t>よみがえったみ子を見てください</a:t>
+            </a:r>
+          </a:p>
+        </p:txBody>
+      </p:sp>
+      <p:sp>
+        <p:nvSpPr>
+          <p:cNvPr id="5" name="TextBox 4"/>
+          <p:cNvSpPr txBox="1"/>
+          <p:nvPr/>
+        </p:nvSpPr>
+        <p:spPr>
+          <a:xfrm>
+            <a:off x="640080" y="4494276"/>
+            <a:ext cx="10911535" cy="310896"/>
+          </a:xfrm>
+          <a:prstGeom prst="rect">
+            <a:avLst/>
+          </a:prstGeom>
+          <a:noFill/>
+        </p:spPr>
+        <p:txBody>
+          <a:bodyPr wrap="square">
+            <a:spAutoFit/>
+          </a:bodyPr>
+          <a:lstStyle/>
+          <a:p>
+            <a:pPr algn="ctr"/>
+            <a:r>
+              <a:rPr sz="2000" b="0" i="0">
+                <a:solidFill>
+                  <a:srgbClr val="828282"/>
+                </a:solidFill>
+                <a:latin typeface="Arial"/>
+              </a:rPr>
+              <a:t>イエスよ救い主よ、とこしえまでも</a:t>
             </a:r>
           </a:p>
         </p:txBody>
